--- a/Base_Model/VLM+VLLM/论文插图.pptx
+++ b/Base_Model/VLM+VLLM/论文插图.pptx
@@ -8,7 +8,7 @@
     <p:notesMasterId r:id="rId4"/>
   </p:notesMasterIdLst>
   <p:handoutMasterIdLst>
-    <p:handoutMasterId r:id="rId23"/>
+    <p:handoutMasterId r:id="rId26"/>
   </p:handoutMasterIdLst>
   <p:sldIdLst>
     <p:sldId id="256" r:id="rId3"/>
@@ -28,8 +28,11 @@
     <p:sldId id="270" r:id="rId18"/>
     <p:sldId id="271" r:id="rId19"/>
     <p:sldId id="272" r:id="rId20"/>
-    <p:sldId id="273" r:id="rId21"/>
-    <p:sldId id="274" r:id="rId22"/>
+    <p:sldId id="274" r:id="rId21"/>
+    <p:sldId id="275" r:id="rId22"/>
+    <p:sldId id="276" r:id="rId23"/>
+    <p:sldId id="279" r:id="rId24"/>
+    <p:sldId id="280" r:id="rId25"/>
   </p:sldIdLst>
   <p:sldSz cx="12192000" cy="6858000"/>
   <p:notesSz cx="7103745" cy="10234295"/>
@@ -8512,1531 +8515,6 @@
       <p:grpSpPr/>
       <p:pic>
         <p:nvPicPr>
-          <p:cNvPr id="4" name="图片 3"/>
-          <p:cNvPicPr>
-            <a:picLocks noChangeAspect="1"/>
-          </p:cNvPicPr>
-          <p:nvPr>
-            <p:custDataLst>
-              <p:tags r:id="rId1"/>
-            </p:custDataLst>
-          </p:nvPr>
-        </p:nvPicPr>
-        <p:blipFill>
-          <a:blip r:embed="rId2"/>
-          <a:stretch>
-            <a:fillRect/>
-          </a:stretch>
-        </p:blipFill>
-        <p:spPr>
-          <a:xfrm>
-            <a:off x="120650" y="2503805"/>
-            <a:ext cx="12084050" cy="2731770"/>
-          </a:xfrm>
-          <a:prstGeom prst="rect">
-            <a:avLst/>
-          </a:prstGeom>
-        </p:spPr>
-      </p:pic>
-      <p:sp>
-        <p:nvSpPr>
-          <p:cNvPr id="7" name="文本框 6"/>
-          <p:cNvSpPr txBox="1"/>
-          <p:nvPr>
-            <p:custDataLst>
-              <p:tags r:id="rId3"/>
-            </p:custDataLst>
-          </p:nvPr>
-        </p:nvSpPr>
-        <p:spPr>
-          <a:xfrm>
-            <a:off x="2209165" y="5235575"/>
-            <a:ext cx="2745740" cy="1362710"/>
-          </a:xfrm>
-          <a:prstGeom prst="rect">
-            <a:avLst/>
-          </a:prstGeom>
-          <a:noFill/>
-        </p:spPr>
-        <p:txBody>
-          <a:bodyPr wrap="square" rtlCol="0">
-            <a:noAutofit/>
-          </a:bodyPr>
-          <a:p>
-            <a:pPr algn="ctr"/>
-            <a:r>
-              <a:rPr lang="zh-CN" altLang="en-US" sz="1400" b="1">
-                <a:latin typeface="微软雅黑" charset="0"/>
-                <a:ea typeface="微软雅黑" charset="0"/>
-                <a:cs typeface="微软雅黑" charset="0"/>
-              </a:rPr>
-              <a:t>图像</a:t>
-            </a:r>
-            <a:r>
-              <a:rPr lang="en-US" altLang="zh-CN" sz="1400" b="1">
-                <a:latin typeface="微软雅黑" charset="0"/>
-                <a:ea typeface="微软雅黑" charset="0"/>
-                <a:cs typeface="微软雅黑" charset="0"/>
-              </a:rPr>
-              <a:t>Transformer</a:t>
-            </a:r>
-            <a:br>
-              <a:rPr lang="zh-CN" altLang="en-US" sz="1400" b="1">
-                <a:latin typeface="微软雅黑" charset="0"/>
-                <a:ea typeface="微软雅黑" charset="0"/>
-                <a:cs typeface="微软雅黑" charset="0"/>
-              </a:rPr>
-            </a:br>
-            <a:r>
-              <a:rPr lang="zh-CN" altLang="en-US" sz="1400" b="1">
-                <a:latin typeface="微软雅黑" charset="0"/>
-                <a:ea typeface="微软雅黑" charset="0"/>
-                <a:cs typeface="微软雅黑" charset="0"/>
-              </a:rPr>
-              <a:t>输入可学习的查询向量</a:t>
-            </a:r>
-            <a:br>
-              <a:rPr lang="zh-CN" altLang="en-US" sz="1400" b="1">
-                <a:latin typeface="微软雅黑" charset="0"/>
-                <a:ea typeface="微软雅黑" charset="0"/>
-                <a:cs typeface="微软雅黑" charset="0"/>
-              </a:rPr>
-            </a:br>
-            <a:r>
-              <a:rPr lang="en-US" altLang="zh-CN" sz="1400" b="1">
-                <a:latin typeface="微软雅黑" charset="0"/>
-                <a:ea typeface="微软雅黑" charset="0"/>
-                <a:cs typeface="微软雅黑" charset="0"/>
-              </a:rPr>
-              <a:t>32</a:t>
-            </a:r>
-            <a:r>
-              <a:rPr lang="zh-CN" altLang="en-US" sz="1400" b="1">
-                <a:latin typeface="微软雅黑" charset="0"/>
-                <a:ea typeface="微软雅黑" charset="0"/>
-                <a:cs typeface="微软雅黑" charset="0"/>
-              </a:rPr>
-              <a:t>个</a:t>
-            </a:r>
-            <a:r>
-              <a:rPr lang="en-US" altLang="zh-CN" sz="1400" b="1">
-                <a:latin typeface="微软雅黑" charset="0"/>
-                <a:ea typeface="微软雅黑" charset="0"/>
-                <a:cs typeface="微软雅黑" charset="0"/>
-              </a:rPr>
-              <a:t> </a:t>
-            </a:r>
-            <a:r>
-              <a:rPr lang="zh-CN" altLang="en-US" sz="1400" b="1">
-                <a:latin typeface="微软雅黑" charset="0"/>
-                <a:ea typeface="微软雅黑" charset="0"/>
-                <a:cs typeface="微软雅黑" charset="0"/>
-              </a:rPr>
-              <a:t>每个维度</a:t>
-            </a:r>
-            <a:r>
-              <a:rPr lang="en-US" altLang="zh-CN" sz="1400" b="1">
-                <a:latin typeface="微软雅黑" charset="0"/>
-                <a:ea typeface="微软雅黑" charset="0"/>
-                <a:cs typeface="微软雅黑" charset="0"/>
-              </a:rPr>
-              <a:t>768</a:t>
-            </a:r>
-            <a:br>
-              <a:rPr lang="en-US" altLang="zh-CN" sz="1400" b="1">
-                <a:latin typeface="微软雅黑" charset="0"/>
-                <a:ea typeface="微软雅黑" charset="0"/>
-                <a:cs typeface="微软雅黑" charset="0"/>
-              </a:rPr>
-            </a:br>
-            <a:r>
-              <a:rPr lang="zh-CN" altLang="en-US" sz="1400" b="1">
-                <a:latin typeface="微软雅黑" charset="0"/>
-                <a:ea typeface="微软雅黑" charset="0"/>
-                <a:cs typeface="微软雅黑" charset="0"/>
-              </a:rPr>
-              <a:t>最终输出</a:t>
-            </a:r>
-            <a:r>
-              <a:rPr lang="en-US" altLang="zh-CN" sz="1400" b="1">
-                <a:latin typeface="微软雅黑" charset="0"/>
-                <a:ea typeface="微软雅黑" charset="0"/>
-                <a:cs typeface="微软雅黑" charset="0"/>
-              </a:rPr>
-              <a:t>32x768</a:t>
-            </a:r>
-            <a:r>
-              <a:rPr lang="zh-CN" altLang="en-US" sz="1400" b="1">
-                <a:latin typeface="微软雅黑" charset="0"/>
-                <a:ea typeface="微软雅黑" charset="0"/>
-                <a:cs typeface="微软雅黑" charset="0"/>
-              </a:rPr>
-              <a:t>的</a:t>
-            </a:r>
-            <a:r>
-              <a:rPr lang="en-US" altLang="zh-CN" sz="1400" b="1">
-                <a:latin typeface="微软雅黑" charset="0"/>
-                <a:ea typeface="微软雅黑" charset="0"/>
-                <a:cs typeface="微软雅黑" charset="0"/>
-              </a:rPr>
-              <a:t>z</a:t>
-            </a:r>
-            <a:r>
-              <a:rPr lang="zh-CN" altLang="en-US" sz="1400" b="1">
-                <a:latin typeface="微软雅黑" charset="0"/>
-                <a:ea typeface="微软雅黑" charset="0"/>
-                <a:cs typeface="微软雅黑" charset="0"/>
-              </a:rPr>
-              <a:t>送入</a:t>
-            </a:r>
-            <a:r>
-              <a:rPr lang="en-US" altLang="zh-CN" sz="1400" b="1">
-                <a:latin typeface="微软雅黑" charset="0"/>
-                <a:ea typeface="微软雅黑" charset="0"/>
-                <a:cs typeface="微软雅黑" charset="0"/>
-              </a:rPr>
-              <a:t>LLM</a:t>
-            </a:r>
-            <a:br>
-              <a:rPr lang="en-US" altLang="zh-CN" sz="1400" b="1">
-                <a:latin typeface="微软雅黑" charset="0"/>
-                <a:ea typeface="微软雅黑" charset="0"/>
-                <a:cs typeface="微软雅黑" charset="0"/>
-              </a:rPr>
-            </a:br>
-            <a:r>
-              <a:rPr lang="zh-CN" altLang="en-US" sz="1400" b="1">
-                <a:latin typeface="微软雅黑" charset="0"/>
-                <a:ea typeface="微软雅黑" charset="0"/>
-                <a:cs typeface="微软雅黑" charset="0"/>
-              </a:rPr>
-              <a:t>相比</a:t>
-            </a:r>
-            <a:r>
-              <a:rPr lang="en-US" altLang="zh-CN" sz="1400" b="1">
-                <a:latin typeface="微软雅黑" charset="0"/>
-                <a:ea typeface="微软雅黑" charset="0"/>
-                <a:cs typeface="微软雅黑" charset="0"/>
-              </a:rPr>
-              <a:t>ViT257x1024</a:t>
-            </a:r>
-            <a:r>
-              <a:rPr lang="zh-CN" altLang="en-US" sz="1400" b="1">
-                <a:latin typeface="微软雅黑" charset="0"/>
-                <a:ea typeface="微软雅黑" charset="0"/>
-                <a:cs typeface="微软雅黑" charset="0"/>
-              </a:rPr>
-              <a:t>是压缩表示，</a:t>
-            </a:r>
-            <a:r>
-              <a:rPr lang="zh-CN" altLang="en-US" sz="1400" b="1">
-                <a:latin typeface="微软雅黑" charset="0"/>
-                <a:ea typeface="微软雅黑" charset="0"/>
-                <a:cs typeface="微软雅黑" charset="0"/>
-              </a:rPr>
-              <a:t>提取最有效的图像</a:t>
-            </a:r>
-            <a:r>
-              <a:rPr lang="zh-CN" altLang="en-US" sz="1400" b="1">
-                <a:latin typeface="微软雅黑" charset="0"/>
-                <a:ea typeface="微软雅黑" charset="0"/>
-                <a:cs typeface="微软雅黑" charset="0"/>
-              </a:rPr>
-              <a:t>语义</a:t>
-            </a:r>
-            <a:endParaRPr lang="zh-CN" altLang="en-US" sz="1400" b="1">
-              <a:latin typeface="微软雅黑" charset="0"/>
-              <a:ea typeface="微软雅黑" charset="0"/>
-              <a:cs typeface="微软雅黑" charset="0"/>
-            </a:endParaRPr>
-          </a:p>
-        </p:txBody>
-      </p:sp>
-      <p:sp>
-        <p:nvSpPr>
-          <p:cNvPr id="6" name="文本框 5"/>
-          <p:cNvSpPr txBox="1"/>
-          <p:nvPr>
-            <p:custDataLst>
-              <p:tags r:id="rId4"/>
-            </p:custDataLst>
-          </p:nvPr>
-        </p:nvSpPr>
-        <p:spPr>
-          <a:xfrm>
-            <a:off x="53975" y="2581275"/>
-            <a:ext cx="2091690" cy="660400"/>
-          </a:xfrm>
-          <a:prstGeom prst="rect">
-            <a:avLst/>
-          </a:prstGeom>
-          <a:noFill/>
-        </p:spPr>
-        <p:txBody>
-          <a:bodyPr wrap="square" rtlCol="0">
-            <a:noAutofit/>
-          </a:bodyPr>
-          <a:p>
-            <a:pPr algn="ctr"/>
-            <a:r>
-              <a:rPr lang="en-US" altLang="zh-CN" sz="1400" b="1">
-                <a:latin typeface="微软雅黑" charset="0"/>
-                <a:ea typeface="微软雅黑" charset="0"/>
-                <a:cs typeface="微软雅黑" charset="0"/>
-              </a:rPr>
-              <a:t>Cross-Attention</a:t>
-            </a:r>
-            <a:br>
-              <a:rPr lang="en-US" altLang="zh-CN" sz="1400" b="1">
-                <a:latin typeface="微软雅黑" charset="0"/>
-                <a:ea typeface="微软雅黑" charset="0"/>
-                <a:cs typeface="微软雅黑" charset="0"/>
-              </a:rPr>
-            </a:br>
-            <a:r>
-              <a:rPr lang="zh-CN" altLang="en-US" sz="1400" b="1">
-                <a:latin typeface="微软雅黑" charset="0"/>
-                <a:ea typeface="微软雅黑" charset="0"/>
-                <a:cs typeface="微软雅黑" charset="0"/>
-              </a:rPr>
-              <a:t>冻结的图像特征与可学习的查询向量</a:t>
-            </a:r>
-            <a:r>
-              <a:rPr lang="zh-CN" altLang="en-US" sz="1400" b="1">
-                <a:latin typeface="微软雅黑" charset="0"/>
-                <a:ea typeface="微软雅黑" charset="0"/>
-                <a:cs typeface="微软雅黑" charset="0"/>
-              </a:rPr>
-              <a:t>交互</a:t>
-            </a:r>
-            <a:endParaRPr lang="zh-CN" altLang="en-US" sz="1400" b="1">
-              <a:latin typeface="微软雅黑" charset="0"/>
-              <a:ea typeface="微软雅黑" charset="0"/>
-              <a:cs typeface="微软雅黑" charset="0"/>
-            </a:endParaRPr>
-          </a:p>
-        </p:txBody>
-      </p:sp>
-      <p:sp>
-        <p:nvSpPr>
-          <p:cNvPr id="9" name="文本框 8"/>
-          <p:cNvSpPr txBox="1"/>
-          <p:nvPr>
-            <p:custDataLst>
-              <p:tags r:id="rId5"/>
-            </p:custDataLst>
-          </p:nvPr>
-        </p:nvSpPr>
-        <p:spPr>
-          <a:xfrm>
-            <a:off x="4747260" y="5235575"/>
-            <a:ext cx="2745740" cy="660400"/>
-          </a:xfrm>
-          <a:prstGeom prst="rect">
-            <a:avLst/>
-          </a:prstGeom>
-          <a:noFill/>
-        </p:spPr>
-        <p:txBody>
-          <a:bodyPr wrap="square" rtlCol="0">
-            <a:noAutofit/>
-          </a:bodyPr>
-          <a:p>
-            <a:pPr algn="ctr"/>
-            <a:r>
-              <a:rPr lang="zh-CN" altLang="en-US" sz="1400" b="1">
-                <a:latin typeface="微软雅黑" charset="0"/>
-                <a:ea typeface="微软雅黑" charset="0"/>
-                <a:cs typeface="微软雅黑" charset="0"/>
-              </a:rPr>
-              <a:t>文本</a:t>
-            </a:r>
-            <a:r>
-              <a:rPr lang="en-US" altLang="zh-CN" sz="1400" b="1">
-                <a:latin typeface="微软雅黑" charset="0"/>
-                <a:ea typeface="微软雅黑" charset="0"/>
-                <a:cs typeface="微软雅黑" charset="0"/>
-              </a:rPr>
-              <a:t>Transformer</a:t>
-            </a:r>
-            <a:br>
-              <a:rPr lang="zh-CN" altLang="en-US" sz="1400" b="1">
-                <a:latin typeface="微软雅黑" charset="0"/>
-                <a:ea typeface="微软雅黑" charset="0"/>
-                <a:cs typeface="微软雅黑" charset="0"/>
-              </a:rPr>
-            </a:br>
-            <a:endParaRPr lang="zh-CN" altLang="en-US" sz="1400" b="1">
-              <a:latin typeface="微软雅黑" charset="0"/>
-              <a:ea typeface="微软雅黑" charset="0"/>
-              <a:cs typeface="微软雅黑" charset="0"/>
-            </a:endParaRPr>
-          </a:p>
-        </p:txBody>
-      </p:sp>
-      <p:sp>
-        <p:nvSpPr>
-          <p:cNvPr id="10" name="文本框 9"/>
-          <p:cNvSpPr txBox="1"/>
-          <p:nvPr>
-            <p:custDataLst>
-              <p:tags r:id="rId6"/>
-            </p:custDataLst>
-          </p:nvPr>
-        </p:nvSpPr>
-        <p:spPr>
-          <a:xfrm>
-            <a:off x="8183245" y="5543550"/>
-            <a:ext cx="2938780" cy="660400"/>
-          </a:xfrm>
-          <a:prstGeom prst="rect">
-            <a:avLst/>
-          </a:prstGeom>
-          <a:noFill/>
-        </p:spPr>
-        <p:txBody>
-          <a:bodyPr wrap="square" rtlCol="0">
-            <a:noAutofit/>
-          </a:bodyPr>
-          <a:p>
-            <a:pPr algn="ctr"/>
-            <a:r>
-              <a:rPr lang="en-US" altLang="zh-CN" sz="1400" b="1">
-                <a:latin typeface="微软雅黑" charset="0"/>
-                <a:ea typeface="微软雅黑" charset="0"/>
-                <a:cs typeface="微软雅黑" charset="0"/>
-              </a:rPr>
-              <a:t>SA</a:t>
-            </a:r>
-            <a:r>
-              <a:rPr lang="zh-CN" altLang="en-US" sz="1400" b="1">
-                <a:latin typeface="微软雅黑" charset="0"/>
-                <a:ea typeface="微软雅黑" charset="0"/>
-                <a:cs typeface="微软雅黑" charset="0"/>
-              </a:rPr>
-              <a:t>和</a:t>
-            </a:r>
-            <a:r>
-              <a:rPr lang="en-US" altLang="zh-CN" sz="1400" b="1">
-                <a:latin typeface="微软雅黑" charset="0"/>
-                <a:ea typeface="微软雅黑" charset="0"/>
-                <a:cs typeface="微软雅黑" charset="0"/>
-              </a:rPr>
-              <a:t>FFN</a:t>
-            </a:r>
-            <a:r>
-              <a:rPr lang="zh-CN" altLang="en-US" sz="1400" b="1">
-                <a:latin typeface="微软雅黑" charset="0"/>
-                <a:ea typeface="微软雅黑" charset="0"/>
-                <a:cs typeface="微软雅黑" charset="0"/>
-              </a:rPr>
-              <a:t>都是从</a:t>
-            </a:r>
-            <a:r>
-              <a:rPr lang="en-US" altLang="zh-CN" sz="1400" b="1">
-                <a:latin typeface="微软雅黑" charset="0"/>
-                <a:ea typeface="微软雅黑" charset="0"/>
-                <a:cs typeface="微软雅黑" charset="0"/>
-              </a:rPr>
-              <a:t>BERT</a:t>
-            </a:r>
-            <a:r>
-              <a:rPr lang="zh-CN" altLang="en-US" sz="1400" b="1">
-                <a:latin typeface="微软雅黑" charset="0"/>
-                <a:ea typeface="微软雅黑" charset="0"/>
-                <a:cs typeface="微软雅黑" charset="0"/>
-              </a:rPr>
-              <a:t>初始化</a:t>
-            </a:r>
-            <a:br>
-              <a:rPr lang="zh-CN" altLang="en-US" sz="1400" b="1">
-                <a:latin typeface="微软雅黑" charset="0"/>
-                <a:ea typeface="微软雅黑" charset="0"/>
-                <a:cs typeface="微软雅黑" charset="0"/>
-              </a:rPr>
-            </a:br>
-            <a:r>
-              <a:rPr lang="en-US" altLang="zh-CN" sz="1400" b="1">
-                <a:latin typeface="微软雅黑" charset="0"/>
-                <a:ea typeface="微软雅黑" charset="0"/>
-                <a:cs typeface="微软雅黑" charset="0"/>
-              </a:rPr>
-              <a:t>CA</a:t>
-            </a:r>
-            <a:r>
-              <a:rPr lang="zh-CN" altLang="en-US" sz="1400" b="1">
-                <a:latin typeface="微软雅黑" charset="0"/>
-                <a:ea typeface="微软雅黑" charset="0"/>
-                <a:cs typeface="微软雅黑" charset="0"/>
-              </a:rPr>
-              <a:t>是随机初始化</a:t>
-            </a:r>
-            <a:br>
-              <a:rPr lang="zh-CN" altLang="en-US" sz="1400" b="1">
-                <a:latin typeface="微软雅黑" charset="0"/>
-                <a:ea typeface="微软雅黑" charset="0"/>
-                <a:cs typeface="微软雅黑" charset="0"/>
-              </a:rPr>
-            </a:br>
-            <a:r>
-              <a:rPr lang="zh-CN" altLang="en-US" sz="1400" b="1">
-                <a:latin typeface="微软雅黑" charset="0"/>
-                <a:ea typeface="微软雅黑" charset="0"/>
-                <a:cs typeface="微软雅黑" charset="0"/>
-              </a:rPr>
-              <a:t>两个</a:t>
-            </a:r>
-            <a:r>
-              <a:rPr lang="en-US" altLang="zh-CN" sz="1400" b="1">
-                <a:latin typeface="微软雅黑" charset="0"/>
-                <a:ea typeface="微软雅黑" charset="0"/>
-                <a:cs typeface="微软雅黑" charset="0"/>
-              </a:rPr>
-              <a:t>Transformer</a:t>
-            </a:r>
-            <a:r>
-              <a:rPr lang="zh-CN" altLang="en-US" sz="1400" b="1">
-                <a:latin typeface="微软雅黑" charset="0"/>
-                <a:ea typeface="微软雅黑" charset="0"/>
-                <a:cs typeface="微软雅黑" charset="0"/>
-              </a:rPr>
-              <a:t>共享</a:t>
-            </a:r>
-            <a:r>
-              <a:rPr lang="en-US" altLang="zh-CN" sz="1400" b="1">
-                <a:latin typeface="微软雅黑" charset="0"/>
-                <a:ea typeface="微软雅黑" charset="0"/>
-                <a:cs typeface="微软雅黑" charset="0"/>
-              </a:rPr>
-              <a:t>SA</a:t>
-            </a:r>
-            <a:endParaRPr lang="en-US" altLang="zh-CN" sz="1400" b="1">
-              <a:latin typeface="微软雅黑" charset="0"/>
-              <a:ea typeface="微软雅黑" charset="0"/>
-              <a:cs typeface="微软雅黑" charset="0"/>
-            </a:endParaRPr>
-          </a:p>
-        </p:txBody>
-      </p:sp>
-      <p:sp>
-        <p:nvSpPr>
-          <p:cNvPr id="11" name="文本框 10"/>
-          <p:cNvSpPr txBox="1"/>
-          <p:nvPr>
-            <p:custDataLst>
-              <p:tags r:id="rId7"/>
-            </p:custDataLst>
-          </p:nvPr>
-        </p:nvSpPr>
-        <p:spPr>
-          <a:xfrm>
-            <a:off x="4991100" y="3107690"/>
-            <a:ext cx="1146810" cy="297180"/>
-          </a:xfrm>
-          <a:prstGeom prst="rect">
-            <a:avLst/>
-          </a:prstGeom>
-          <a:noFill/>
-        </p:spPr>
-        <p:txBody>
-          <a:bodyPr wrap="square" rtlCol="0">
-            <a:noAutofit/>
-          </a:bodyPr>
-          <a:p>
-            <a:pPr algn="ctr"/>
-            <a:r>
-              <a:rPr lang="en-US" altLang="zh-CN" sz="1400" b="1">
-                <a:latin typeface="微软雅黑" charset="0"/>
-                <a:ea typeface="微软雅黑" charset="0"/>
-                <a:cs typeface="微软雅黑" charset="0"/>
-              </a:rPr>
-              <a:t>[CL</a:t>
-            </a:r>
-            <a:r>
-              <a:rPr lang="en-US" altLang="zh-CN" sz="1400" b="1">
-                <a:latin typeface="微软雅黑" charset="0"/>
-                <a:ea typeface="微软雅黑" charset="0"/>
-                <a:cs typeface="微软雅黑" charset="0"/>
-              </a:rPr>
-              <a:t>S]</a:t>
-            </a:r>
-            <a:endParaRPr lang="en-US" altLang="zh-CN" sz="1400" b="1">
-              <a:latin typeface="微软雅黑" charset="0"/>
-              <a:ea typeface="微软雅黑" charset="0"/>
-              <a:cs typeface="微软雅黑" charset="0"/>
-            </a:endParaRPr>
-          </a:p>
-        </p:txBody>
-      </p:sp>
-      <p:sp>
-        <p:nvSpPr>
-          <p:cNvPr id="13" name="文本框 12"/>
-          <p:cNvSpPr txBox="1"/>
-          <p:nvPr>
-            <p:custDataLst>
-              <p:tags r:id="rId8"/>
-            </p:custDataLst>
-          </p:nvPr>
-        </p:nvSpPr>
-        <p:spPr>
-          <a:xfrm>
-            <a:off x="3588385" y="3101975"/>
-            <a:ext cx="1146810" cy="297180"/>
-          </a:xfrm>
-          <a:prstGeom prst="rect">
-            <a:avLst/>
-          </a:prstGeom>
-          <a:noFill/>
-        </p:spPr>
-        <p:txBody>
-          <a:bodyPr wrap="square" rtlCol="0">
-            <a:noAutofit/>
-          </a:bodyPr>
-          <a:p>
-            <a:pPr algn="ctr"/>
-            <a:r>
-              <a:rPr lang="en-US" altLang="zh-CN" sz="1400" b="1">
-                <a:latin typeface="微软雅黑" charset="0"/>
-                <a:ea typeface="微软雅黑" charset="0"/>
-                <a:cs typeface="微软雅黑" charset="0"/>
-              </a:rPr>
-              <a:t>32</a:t>
-            </a:r>
-            <a:r>
-              <a:rPr lang="zh-CN" altLang="en-US" sz="1400" b="1">
-                <a:latin typeface="微软雅黑" charset="0"/>
-                <a:ea typeface="微软雅黑" charset="0"/>
-                <a:cs typeface="微软雅黑" charset="0"/>
-              </a:rPr>
-              <a:t>个</a:t>
-            </a:r>
-            <a:r>
-              <a:rPr lang="zh-CN" altLang="en-US" sz="1400" b="1">
-                <a:latin typeface="微软雅黑" charset="0"/>
-                <a:ea typeface="微软雅黑" charset="0"/>
-                <a:cs typeface="微软雅黑" charset="0"/>
-              </a:rPr>
-              <a:t>输出</a:t>
-            </a:r>
-            <a:endParaRPr lang="zh-CN" altLang="en-US" sz="1400" b="1">
-              <a:latin typeface="微软雅黑" charset="0"/>
-              <a:ea typeface="微软雅黑" charset="0"/>
-              <a:cs typeface="微软雅黑" charset="0"/>
-            </a:endParaRPr>
-          </a:p>
-        </p:txBody>
-      </p:sp>
-      <p:sp>
-        <p:nvSpPr>
-          <p:cNvPr id="14" name="文本框 13"/>
-          <p:cNvSpPr txBox="1"/>
-          <p:nvPr>
-            <p:custDataLst>
-              <p:tags r:id="rId9"/>
-            </p:custDataLst>
-          </p:nvPr>
-        </p:nvSpPr>
-        <p:spPr>
-          <a:xfrm>
-            <a:off x="4345305" y="2659380"/>
-            <a:ext cx="1146810" cy="297180"/>
-          </a:xfrm>
-          <a:prstGeom prst="rect">
-            <a:avLst/>
-          </a:prstGeom>
-          <a:noFill/>
-        </p:spPr>
-        <p:txBody>
-          <a:bodyPr wrap="square" rtlCol="0">
-            <a:noAutofit/>
-          </a:bodyPr>
-          <a:p>
-            <a:pPr algn="ctr"/>
-            <a:r>
-              <a:rPr lang="en-US" altLang="zh-CN" sz="1400" b="1">
-                <a:latin typeface="微软雅黑" charset="0"/>
-                <a:ea typeface="微软雅黑" charset="0"/>
-                <a:cs typeface="微软雅黑" charset="0"/>
-              </a:rPr>
-              <a:t>ITC</a:t>
-            </a:r>
-            <a:endParaRPr lang="en-US" altLang="zh-CN" sz="1400" b="1">
-              <a:latin typeface="微软雅黑" charset="0"/>
-              <a:ea typeface="微软雅黑" charset="0"/>
-              <a:cs typeface="微软雅黑" charset="0"/>
-            </a:endParaRPr>
-          </a:p>
-        </p:txBody>
-      </p:sp>
-      <p:sp>
-        <p:nvSpPr>
-          <p:cNvPr id="15" name="文本框 14"/>
-          <p:cNvSpPr txBox="1"/>
-          <p:nvPr>
-            <p:custDataLst>
-              <p:tags r:id="rId10"/>
-            </p:custDataLst>
-          </p:nvPr>
-        </p:nvSpPr>
-        <p:spPr>
-          <a:xfrm>
-            <a:off x="10102850" y="2181225"/>
-            <a:ext cx="2345690" cy="659765"/>
-          </a:xfrm>
-          <a:prstGeom prst="rect">
-            <a:avLst/>
-          </a:prstGeom>
-          <a:noFill/>
-        </p:spPr>
-        <p:txBody>
-          <a:bodyPr wrap="square" rtlCol="0">
-            <a:noAutofit/>
-          </a:bodyPr>
-          <a:p>
-            <a:pPr algn="ctr"/>
-            <a:r>
-              <a:rPr lang="en-US" altLang="zh-CN" sz="1400" b="1">
-                <a:latin typeface="微软雅黑" charset="0"/>
-                <a:ea typeface="微软雅黑" charset="0"/>
-                <a:cs typeface="微软雅黑" charset="0"/>
-              </a:rPr>
-              <a:t>ITC</a:t>
-            </a:r>
-            <a:br>
-              <a:rPr lang="en-US" altLang="zh-CN" sz="1400" b="1">
-                <a:latin typeface="微软雅黑" charset="0"/>
-                <a:ea typeface="微软雅黑" charset="0"/>
-                <a:cs typeface="微软雅黑" charset="0"/>
-              </a:rPr>
-            </a:br>
-            <a:r>
-              <a:rPr lang="zh-CN" altLang="en-US" sz="1400" b="1">
-                <a:latin typeface="微软雅黑" charset="0"/>
-                <a:ea typeface="微软雅黑" charset="0"/>
-                <a:cs typeface="微软雅黑" charset="0"/>
-              </a:rPr>
-              <a:t>无交互</a:t>
-            </a:r>
-            <a:endParaRPr lang="zh-CN" altLang="en-US" sz="1400" b="1">
-              <a:latin typeface="微软雅黑" charset="0"/>
-              <a:ea typeface="微软雅黑" charset="0"/>
-              <a:cs typeface="微软雅黑" charset="0"/>
-            </a:endParaRPr>
-          </a:p>
-          <a:p>
-            <a:pPr algn="ctr"/>
-            <a:r>
-              <a:rPr lang="en-US" altLang="zh-CN" sz="1400" b="1">
-                <a:latin typeface="微软雅黑" charset="0"/>
-                <a:ea typeface="微软雅黑" charset="0"/>
-                <a:cs typeface="微软雅黑" charset="0"/>
-              </a:rPr>
-              <a:t>Image</a:t>
-            </a:r>
-            <a:r>
-              <a:rPr lang="zh-CN" altLang="en-US" sz="1400" b="1">
-                <a:latin typeface="微软雅黑" charset="0"/>
-                <a:ea typeface="微软雅黑" charset="0"/>
-                <a:cs typeface="微软雅黑" charset="0"/>
-              </a:rPr>
-              <a:t>和</a:t>
-            </a:r>
-            <a:r>
-              <a:rPr lang="en-US" altLang="zh-CN" sz="1400" b="1">
-                <a:latin typeface="微软雅黑" charset="0"/>
-                <a:ea typeface="微软雅黑" charset="0"/>
-                <a:cs typeface="微软雅黑" charset="0"/>
-              </a:rPr>
-              <a:t>Text</a:t>
-            </a:r>
-            <a:br>
-              <a:rPr lang="en-US" altLang="zh-CN" sz="1400" b="1">
-                <a:latin typeface="微软雅黑" charset="0"/>
-                <a:ea typeface="微软雅黑" charset="0"/>
-                <a:cs typeface="微软雅黑" charset="0"/>
-              </a:rPr>
-            </a:br>
-            <a:r>
-              <a:rPr lang="zh-CN" altLang="en-US" sz="1400" b="1">
-                <a:latin typeface="微软雅黑" charset="0"/>
-                <a:ea typeface="微软雅黑" charset="0"/>
-                <a:cs typeface="微软雅黑" charset="0"/>
-              </a:rPr>
-              <a:t>单独做</a:t>
-            </a:r>
-            <a:r>
-              <a:rPr lang="zh-CN" altLang="en-US" sz="1400" b="1">
-                <a:latin typeface="微软雅黑" charset="0"/>
-                <a:ea typeface="微软雅黑" charset="0"/>
-                <a:cs typeface="微软雅黑" charset="0"/>
-              </a:rPr>
-              <a:t>注意力</a:t>
-            </a:r>
-            <a:endParaRPr lang="zh-CN" altLang="en-US" sz="1400" b="1">
-              <a:latin typeface="微软雅黑" charset="0"/>
-              <a:ea typeface="微软雅黑" charset="0"/>
-              <a:cs typeface="微软雅黑" charset="0"/>
-            </a:endParaRPr>
-          </a:p>
-        </p:txBody>
-      </p:sp>
-      <p:sp>
-        <p:nvSpPr>
-          <p:cNvPr id="16" name="文本框 15"/>
-          <p:cNvSpPr txBox="1"/>
-          <p:nvPr>
-            <p:custDataLst>
-              <p:tags r:id="rId11"/>
-            </p:custDataLst>
-          </p:nvPr>
-        </p:nvSpPr>
-        <p:spPr>
-          <a:xfrm>
-            <a:off x="3296285" y="803275"/>
-            <a:ext cx="2938780" cy="660400"/>
-          </a:xfrm>
-          <a:prstGeom prst="rect">
-            <a:avLst/>
-          </a:prstGeom>
-          <a:noFill/>
-        </p:spPr>
-        <p:txBody>
-          <a:bodyPr wrap="square" rtlCol="0">
-            <a:noAutofit/>
-          </a:bodyPr>
-          <a:p>
-            <a:pPr algn="ctr"/>
-            <a:r>
-              <a:rPr lang="zh-CN" altLang="en-US" sz="1400" b="1">
-                <a:latin typeface="微软雅黑" charset="0"/>
-                <a:ea typeface="微软雅黑" charset="0"/>
-                <a:cs typeface="微软雅黑" charset="0"/>
-              </a:rPr>
-              <a:t>因为参数量小了，所以</a:t>
-            </a:r>
-            <a:r>
-              <a:rPr lang="en-US" altLang="zh-CN" sz="1400" b="1">
-                <a:latin typeface="微软雅黑" charset="0"/>
-                <a:ea typeface="微软雅黑" charset="0"/>
-                <a:cs typeface="微软雅黑" charset="0"/>
-              </a:rPr>
-              <a:t>BatchSize</a:t>
-            </a:r>
-            <a:r>
-              <a:rPr lang="zh-CN" altLang="en-US" sz="1400" b="1">
-                <a:latin typeface="微软雅黑" charset="0"/>
-                <a:ea typeface="微软雅黑" charset="0"/>
-                <a:cs typeface="微软雅黑" charset="0"/>
-              </a:rPr>
-              <a:t>可以很大，所以取消了动量</a:t>
-            </a:r>
-            <a:r>
-              <a:rPr lang="zh-CN" altLang="en-US" sz="1400" b="1">
-                <a:latin typeface="微软雅黑" charset="0"/>
-                <a:ea typeface="微软雅黑" charset="0"/>
-                <a:cs typeface="微软雅黑" charset="0"/>
-              </a:rPr>
-              <a:t>模型</a:t>
-            </a:r>
-            <a:endParaRPr lang="zh-CN" altLang="en-US" sz="1400" b="1">
-              <a:latin typeface="微软雅黑" charset="0"/>
-              <a:ea typeface="微软雅黑" charset="0"/>
-              <a:cs typeface="微软雅黑" charset="0"/>
-            </a:endParaRPr>
-          </a:p>
-        </p:txBody>
-      </p:sp>
-      <p:sp>
-        <p:nvSpPr>
-          <p:cNvPr id="17" name="文本框 16"/>
-          <p:cNvSpPr txBox="1"/>
-          <p:nvPr>
-            <p:custDataLst>
-              <p:tags r:id="rId12"/>
-            </p:custDataLst>
-          </p:nvPr>
-        </p:nvSpPr>
-        <p:spPr>
-          <a:xfrm>
-            <a:off x="7054850" y="1921510"/>
-            <a:ext cx="2345690" cy="918845"/>
-          </a:xfrm>
-          <a:prstGeom prst="rect">
-            <a:avLst/>
-          </a:prstGeom>
-          <a:noFill/>
-        </p:spPr>
-        <p:txBody>
-          <a:bodyPr wrap="square" rtlCol="0">
-            <a:noAutofit/>
-          </a:bodyPr>
-          <a:p>
-            <a:pPr algn="ctr"/>
-            <a:r>
-              <a:rPr lang="en-US" altLang="zh-CN" sz="1400" b="1">
-                <a:latin typeface="微软雅黑" charset="0"/>
-                <a:ea typeface="微软雅黑" charset="0"/>
-                <a:cs typeface="微软雅黑" charset="0"/>
-              </a:rPr>
-              <a:t>IT</a:t>
-            </a:r>
-            <a:r>
-              <a:rPr lang="en-US" altLang="zh-CN" sz="1400" b="1">
-                <a:latin typeface="微软雅黑" charset="0"/>
-                <a:ea typeface="微软雅黑" charset="0"/>
-                <a:cs typeface="微软雅黑" charset="0"/>
-              </a:rPr>
-              <a:t>M</a:t>
-            </a:r>
-            <a:br>
-              <a:rPr lang="en-US" altLang="zh-CN" sz="1400" b="1">
-                <a:latin typeface="微软雅黑" charset="0"/>
-                <a:ea typeface="微软雅黑" charset="0"/>
-                <a:cs typeface="微软雅黑" charset="0"/>
-              </a:rPr>
-            </a:br>
-            <a:r>
-              <a:rPr lang="zh-CN" altLang="en-US" sz="1400" b="1">
-                <a:latin typeface="微软雅黑" charset="0"/>
-                <a:ea typeface="微软雅黑" charset="0"/>
-                <a:cs typeface="微软雅黑" charset="0"/>
-              </a:rPr>
-              <a:t>交互</a:t>
-            </a:r>
-            <a:endParaRPr lang="zh-CN" altLang="en-US" sz="1400" b="1">
-              <a:latin typeface="微软雅黑" charset="0"/>
-              <a:ea typeface="微软雅黑" charset="0"/>
-              <a:cs typeface="微软雅黑" charset="0"/>
-            </a:endParaRPr>
-          </a:p>
-          <a:p>
-            <a:pPr algn="ctr"/>
-            <a:r>
-              <a:rPr lang="en-US" altLang="zh-CN" sz="1400" b="1">
-                <a:latin typeface="微软雅黑" charset="0"/>
-                <a:ea typeface="微软雅黑" charset="0"/>
-                <a:cs typeface="微软雅黑" charset="0"/>
-              </a:rPr>
-              <a:t>Image</a:t>
-            </a:r>
-            <a:r>
-              <a:rPr lang="zh-CN" altLang="en-US" sz="1400" b="1">
-                <a:latin typeface="微软雅黑" charset="0"/>
-                <a:ea typeface="微软雅黑" charset="0"/>
-                <a:cs typeface="微软雅黑" charset="0"/>
-              </a:rPr>
-              <a:t>和</a:t>
-            </a:r>
-            <a:r>
-              <a:rPr lang="en-US" altLang="zh-CN" sz="1400" b="1">
-                <a:latin typeface="微软雅黑" charset="0"/>
-                <a:ea typeface="微软雅黑" charset="0"/>
-                <a:cs typeface="微软雅黑" charset="0"/>
-              </a:rPr>
-              <a:t>Text</a:t>
-            </a:r>
-            <a:br>
-              <a:rPr lang="en-US" altLang="zh-CN" sz="1400" b="1">
-                <a:latin typeface="微软雅黑" charset="0"/>
-                <a:ea typeface="微软雅黑" charset="0"/>
-                <a:cs typeface="微软雅黑" charset="0"/>
-              </a:rPr>
-            </a:br>
-            <a:r>
-              <a:rPr lang="zh-CN" altLang="en-US" sz="1400" b="1">
-                <a:latin typeface="微软雅黑" charset="0"/>
-                <a:ea typeface="微软雅黑" charset="0"/>
-                <a:cs typeface="微软雅黑" charset="0"/>
-              </a:rPr>
-              <a:t>交叉注意力</a:t>
-            </a:r>
-            <a:endParaRPr lang="zh-CN" altLang="en-US" sz="1400" b="1">
-              <a:latin typeface="微软雅黑" charset="0"/>
-              <a:ea typeface="微软雅黑" charset="0"/>
-              <a:cs typeface="微软雅黑" charset="0"/>
-            </a:endParaRPr>
-          </a:p>
-        </p:txBody>
-      </p:sp>
-      <p:sp>
-        <p:nvSpPr>
-          <p:cNvPr id="18" name="文本框 17"/>
-          <p:cNvSpPr txBox="1"/>
-          <p:nvPr>
-            <p:custDataLst>
-              <p:tags r:id="rId13"/>
-            </p:custDataLst>
-          </p:nvPr>
-        </p:nvSpPr>
-        <p:spPr>
-          <a:xfrm>
-            <a:off x="3755390" y="3769360"/>
-            <a:ext cx="2345690" cy="297815"/>
-          </a:xfrm>
-          <a:prstGeom prst="rect">
-            <a:avLst/>
-          </a:prstGeom>
-          <a:noFill/>
-        </p:spPr>
-        <p:txBody>
-          <a:bodyPr wrap="square" rtlCol="0">
-            <a:noAutofit/>
-          </a:bodyPr>
-          <a:p>
-            <a:pPr algn="ctr"/>
-            <a:r>
-              <a:rPr lang="zh-CN" altLang="en-US" sz="1200" b="1">
-                <a:latin typeface="微软雅黑" charset="0"/>
-                <a:ea typeface="微软雅黑" charset="0"/>
-                <a:cs typeface="微软雅黑" charset="0"/>
-              </a:rPr>
-              <a:t>两个Transformer共享SA</a:t>
-            </a:r>
-            <a:endParaRPr lang="zh-CN" altLang="en-US" sz="1200" b="1">
-              <a:latin typeface="微软雅黑" charset="0"/>
-              <a:ea typeface="微软雅黑" charset="0"/>
-              <a:cs typeface="微软雅黑" charset="0"/>
-            </a:endParaRPr>
-          </a:p>
-        </p:txBody>
-      </p:sp>
-      <p:sp>
-        <p:nvSpPr>
-          <p:cNvPr id="19" name="文本框 18"/>
-          <p:cNvSpPr txBox="1"/>
-          <p:nvPr>
-            <p:custDataLst>
-              <p:tags r:id="rId14"/>
-            </p:custDataLst>
-          </p:nvPr>
-        </p:nvSpPr>
-        <p:spPr>
-          <a:xfrm>
-            <a:off x="10296525" y="1183005"/>
-            <a:ext cx="1895475" cy="918845"/>
-          </a:xfrm>
-          <a:prstGeom prst="rect">
-            <a:avLst/>
-          </a:prstGeom>
-          <a:noFill/>
-        </p:spPr>
-        <p:txBody>
-          <a:bodyPr wrap="square" rtlCol="0">
-            <a:noAutofit/>
-          </a:bodyPr>
-          <a:p>
-            <a:pPr algn="ctr"/>
-            <a:r>
-              <a:rPr lang="zh-CN" altLang="en-US" sz="1400" b="1">
-                <a:solidFill>
-                  <a:srgbClr val="C00000"/>
-                </a:solidFill>
-                <a:latin typeface="微软雅黑" charset="0"/>
-                <a:ea typeface="微软雅黑" charset="0"/>
-                <a:cs typeface="微软雅黑" charset="0"/>
-              </a:rPr>
-              <a:t>文本</a:t>
-            </a:r>
-            <a:r>
-              <a:rPr lang="en-US" altLang="zh-CN" sz="1400" b="1">
-                <a:solidFill>
-                  <a:srgbClr val="C00000"/>
-                </a:solidFill>
-                <a:latin typeface="微软雅黑" charset="0"/>
-                <a:ea typeface="微软雅黑" charset="0"/>
-                <a:cs typeface="微软雅黑" charset="0"/>
-              </a:rPr>
-              <a:t>CLS</a:t>
-            </a:r>
-            <a:r>
-              <a:rPr lang="zh-CN" altLang="en-US" sz="1400" b="1">
-                <a:solidFill>
-                  <a:srgbClr val="C00000"/>
-                </a:solidFill>
-                <a:latin typeface="微软雅黑" charset="0"/>
-                <a:ea typeface="微软雅黑" charset="0"/>
-                <a:cs typeface="微软雅黑" charset="0"/>
-              </a:rPr>
-              <a:t>和</a:t>
-            </a:r>
-            <a:r>
-              <a:rPr lang="en-US" altLang="zh-CN" sz="1400" b="1">
-                <a:solidFill>
-                  <a:srgbClr val="C00000"/>
-                </a:solidFill>
-                <a:latin typeface="微软雅黑" charset="0"/>
-                <a:ea typeface="微软雅黑" charset="0"/>
-                <a:cs typeface="微软雅黑" charset="0"/>
-              </a:rPr>
-              <a:t>32</a:t>
-            </a:r>
-            <a:r>
-              <a:rPr lang="zh-CN" altLang="en-US" sz="1400" b="1">
-                <a:solidFill>
-                  <a:srgbClr val="C00000"/>
-                </a:solidFill>
-                <a:latin typeface="微软雅黑" charset="0"/>
-                <a:ea typeface="微软雅黑" charset="0"/>
-                <a:cs typeface="微软雅黑" charset="0"/>
-              </a:rPr>
-              <a:t>个图片特征分别计算相似度</a:t>
-            </a:r>
-            <a:br>
-              <a:rPr lang="zh-CN" altLang="en-US" sz="1400" b="1">
-                <a:solidFill>
-                  <a:srgbClr val="C00000"/>
-                </a:solidFill>
-                <a:latin typeface="微软雅黑" charset="0"/>
-                <a:ea typeface="微软雅黑" charset="0"/>
-                <a:cs typeface="微软雅黑" charset="0"/>
-              </a:rPr>
-            </a:br>
-            <a:r>
-              <a:rPr lang="zh-CN" altLang="en-US" sz="1400" b="1">
-                <a:solidFill>
-                  <a:srgbClr val="C00000"/>
-                </a:solidFill>
-                <a:latin typeface="微软雅黑" charset="0"/>
-                <a:ea typeface="微软雅黑" charset="0"/>
-                <a:cs typeface="微软雅黑" charset="0"/>
-              </a:rPr>
-              <a:t>取</a:t>
-            </a:r>
-            <a:r>
-              <a:rPr lang="en-US" altLang="zh-CN" sz="1400" b="1">
-                <a:solidFill>
-                  <a:srgbClr val="C00000"/>
-                </a:solidFill>
-                <a:latin typeface="微软雅黑" charset="0"/>
-                <a:ea typeface="微软雅黑" charset="0"/>
-                <a:cs typeface="微软雅黑" charset="0"/>
-              </a:rPr>
-              <a:t>32</a:t>
-            </a:r>
-            <a:r>
-              <a:rPr lang="zh-CN" altLang="en-US" sz="1400" b="1">
-                <a:solidFill>
-                  <a:srgbClr val="C00000"/>
-                </a:solidFill>
-                <a:latin typeface="微软雅黑" charset="0"/>
-                <a:ea typeface="微软雅黑" charset="0"/>
-                <a:cs typeface="微软雅黑" charset="0"/>
-              </a:rPr>
-              <a:t>个</a:t>
-            </a:r>
-            <a:r>
-              <a:rPr lang="zh-CN" altLang="en-US" sz="1400" b="1">
-                <a:solidFill>
-                  <a:srgbClr val="C00000"/>
-                </a:solidFill>
-                <a:latin typeface="微软雅黑" charset="0"/>
-                <a:ea typeface="微软雅黑" charset="0"/>
-                <a:cs typeface="微软雅黑" charset="0"/>
-              </a:rPr>
-              <a:t>中最大的作为</a:t>
-            </a:r>
-            <a:r>
-              <a:rPr lang="zh-CN" altLang="en-US" sz="1400" b="1">
-                <a:solidFill>
-                  <a:srgbClr val="C00000"/>
-                </a:solidFill>
-                <a:latin typeface="微软雅黑" charset="0"/>
-                <a:ea typeface="微软雅黑" charset="0"/>
-                <a:cs typeface="微软雅黑" charset="0"/>
-              </a:rPr>
-              <a:t>相似度</a:t>
-            </a:r>
-            <a:endParaRPr lang="zh-CN" altLang="en-US" sz="1400" b="1">
-              <a:solidFill>
-                <a:srgbClr val="C00000"/>
-              </a:solidFill>
-              <a:latin typeface="微软雅黑" charset="0"/>
-              <a:ea typeface="微软雅黑" charset="0"/>
-              <a:cs typeface="微软雅黑" charset="0"/>
-            </a:endParaRPr>
-          </a:p>
-        </p:txBody>
-      </p:sp>
-      <p:sp>
-        <p:nvSpPr>
-          <p:cNvPr id="20" name="文本框 19"/>
-          <p:cNvSpPr txBox="1"/>
-          <p:nvPr>
-            <p:custDataLst>
-              <p:tags r:id="rId15"/>
-            </p:custDataLst>
-          </p:nvPr>
-        </p:nvSpPr>
-        <p:spPr>
-          <a:xfrm>
-            <a:off x="6873875" y="929005"/>
-            <a:ext cx="2645410" cy="918845"/>
-          </a:xfrm>
-          <a:prstGeom prst="rect">
-            <a:avLst/>
-          </a:prstGeom>
-          <a:noFill/>
-        </p:spPr>
-        <p:txBody>
-          <a:bodyPr wrap="square" rtlCol="0">
-            <a:noAutofit/>
-          </a:bodyPr>
-          <a:p>
-            <a:pPr algn="ctr"/>
-            <a:r>
-              <a:rPr lang="zh-CN" altLang="en-US" sz="1400" b="1">
-                <a:solidFill>
-                  <a:srgbClr val="C00000"/>
-                </a:solidFill>
-                <a:latin typeface="微软雅黑" charset="0"/>
-                <a:ea typeface="微软雅黑" charset="0"/>
-                <a:cs typeface="微软雅黑" charset="0"/>
-              </a:rPr>
-              <a:t>文本特征和</a:t>
-            </a:r>
-            <a:r>
-              <a:rPr lang="en-US" altLang="zh-CN" sz="1400" b="1">
-                <a:solidFill>
-                  <a:srgbClr val="C00000"/>
-                </a:solidFill>
-                <a:latin typeface="微软雅黑" charset="0"/>
-                <a:ea typeface="微软雅黑" charset="0"/>
-                <a:cs typeface="微软雅黑" charset="0"/>
-              </a:rPr>
-              <a:t>32</a:t>
-            </a:r>
-            <a:r>
-              <a:rPr lang="zh-CN" altLang="en-US" sz="1400" b="1">
-                <a:solidFill>
-                  <a:srgbClr val="C00000"/>
-                </a:solidFill>
-                <a:latin typeface="微软雅黑" charset="0"/>
-                <a:ea typeface="微软雅黑" charset="0"/>
-                <a:cs typeface="微软雅黑" charset="0"/>
-              </a:rPr>
-              <a:t>个图片特征分别计算二分类</a:t>
-            </a:r>
-            <a:r>
-              <a:rPr lang="en-US" altLang="zh-CN" sz="1400" b="1">
-                <a:solidFill>
-                  <a:srgbClr val="C00000"/>
-                </a:solidFill>
-                <a:latin typeface="微软雅黑" charset="0"/>
-                <a:ea typeface="微软雅黑" charset="0"/>
-                <a:cs typeface="微软雅黑" charset="0"/>
-              </a:rPr>
-              <a:t>logit</a:t>
-            </a:r>
-            <a:br>
-              <a:rPr lang="zh-CN" altLang="en-US" sz="1400" b="1">
-                <a:solidFill>
-                  <a:srgbClr val="C00000"/>
-                </a:solidFill>
-                <a:latin typeface="微软雅黑" charset="0"/>
-                <a:ea typeface="微软雅黑" charset="0"/>
-                <a:cs typeface="微软雅黑" charset="0"/>
-              </a:rPr>
-            </a:br>
-            <a:r>
-              <a:rPr lang="zh-CN" altLang="en-US" sz="1400" b="1">
-                <a:solidFill>
-                  <a:srgbClr val="C00000"/>
-                </a:solidFill>
-                <a:latin typeface="微软雅黑" charset="0"/>
-                <a:ea typeface="微软雅黑" charset="0"/>
-                <a:cs typeface="微软雅黑" charset="0"/>
-              </a:rPr>
-              <a:t>取</a:t>
-            </a:r>
-            <a:r>
-              <a:rPr lang="en-US" altLang="zh-CN" sz="1400" b="1">
-                <a:solidFill>
-                  <a:srgbClr val="C00000"/>
-                </a:solidFill>
-                <a:latin typeface="微软雅黑" charset="0"/>
-                <a:ea typeface="微软雅黑" charset="0"/>
-                <a:cs typeface="微软雅黑" charset="0"/>
-              </a:rPr>
-              <a:t>32</a:t>
-            </a:r>
-            <a:r>
-              <a:rPr lang="zh-CN" altLang="en-US" sz="1400" b="1">
-                <a:solidFill>
-                  <a:srgbClr val="C00000"/>
-                </a:solidFill>
-                <a:latin typeface="微软雅黑" charset="0"/>
-                <a:ea typeface="微软雅黑" charset="0"/>
-                <a:cs typeface="微软雅黑" charset="0"/>
-              </a:rPr>
-              <a:t>个平均的作为</a:t>
-            </a:r>
-            <a:r>
-              <a:rPr lang="en-US" altLang="zh-CN" sz="1400" b="1">
-                <a:solidFill>
-                  <a:srgbClr val="C00000"/>
-                </a:solidFill>
-                <a:latin typeface="微软雅黑" charset="0"/>
-                <a:ea typeface="微软雅黑" charset="0"/>
-                <a:cs typeface="微软雅黑" charset="0"/>
-              </a:rPr>
-              <a:t>logit</a:t>
-            </a:r>
-            <a:endParaRPr lang="en-US" altLang="zh-CN" sz="1400" b="1">
-              <a:solidFill>
-                <a:srgbClr val="C00000"/>
-              </a:solidFill>
-              <a:latin typeface="微软雅黑" charset="0"/>
-              <a:ea typeface="微软雅黑" charset="0"/>
-              <a:cs typeface="微软雅黑" charset="0"/>
-            </a:endParaRPr>
-          </a:p>
-        </p:txBody>
-      </p:sp>
-      <p:sp>
-        <p:nvSpPr>
-          <p:cNvPr id="21" name="文本框 20"/>
-          <p:cNvSpPr txBox="1"/>
-          <p:nvPr>
-            <p:custDataLst>
-              <p:tags r:id="rId16"/>
-            </p:custDataLst>
-          </p:nvPr>
-        </p:nvSpPr>
-        <p:spPr>
-          <a:xfrm>
-            <a:off x="8634730" y="1921510"/>
-            <a:ext cx="2345690" cy="918845"/>
-          </a:xfrm>
-          <a:prstGeom prst="rect">
-            <a:avLst/>
-          </a:prstGeom>
-          <a:noFill/>
-        </p:spPr>
-        <p:txBody>
-          <a:bodyPr wrap="square" rtlCol="0">
-            <a:noAutofit/>
-          </a:bodyPr>
-          <a:p>
-            <a:pPr algn="ctr"/>
-            <a:r>
-              <a:rPr lang="en-US" altLang="zh-CN" sz="1400" b="1">
-                <a:latin typeface="微软雅黑" charset="0"/>
-                <a:ea typeface="微软雅黑" charset="0"/>
-                <a:cs typeface="微软雅黑" charset="0"/>
-              </a:rPr>
-              <a:t>LM</a:t>
-            </a:r>
-            <a:endParaRPr lang="en-US" altLang="zh-CN" sz="1400" b="1">
-              <a:latin typeface="微软雅黑" charset="0"/>
-              <a:ea typeface="微软雅黑" charset="0"/>
-              <a:cs typeface="微软雅黑" charset="0"/>
-            </a:endParaRPr>
-          </a:p>
-          <a:p>
-            <a:pPr algn="ctr"/>
-            <a:r>
-              <a:rPr lang="zh-CN" altLang="en-US" sz="1400" b="1">
-                <a:latin typeface="微软雅黑" charset="0"/>
-                <a:ea typeface="微软雅黑" charset="0"/>
-                <a:cs typeface="微软雅黑" charset="0"/>
-              </a:rPr>
-              <a:t>交互</a:t>
-            </a:r>
-            <a:br>
-              <a:rPr lang="zh-CN" altLang="en-US" sz="1400" b="1">
-                <a:latin typeface="微软雅黑" charset="0"/>
-                <a:ea typeface="微软雅黑" charset="0"/>
-                <a:cs typeface="微软雅黑" charset="0"/>
-              </a:rPr>
-            </a:br>
-            <a:r>
-              <a:rPr lang="en-US" altLang="zh-CN" sz="1400" b="1">
-                <a:latin typeface="微软雅黑" charset="0"/>
-                <a:ea typeface="微软雅黑" charset="0"/>
-                <a:cs typeface="微软雅黑" charset="0"/>
-              </a:rPr>
-              <a:t>Q</a:t>
-            </a:r>
-            <a:r>
-              <a:rPr lang="zh-CN" altLang="en-US" sz="1400" b="1">
-                <a:latin typeface="微软雅黑" charset="0"/>
-                <a:ea typeface="微软雅黑" charset="0"/>
-                <a:cs typeface="微软雅黑" charset="0"/>
-              </a:rPr>
-              <a:t>看不到</a:t>
-            </a:r>
-            <a:r>
-              <a:rPr lang="en-US" altLang="zh-CN" sz="1400" b="1">
-                <a:latin typeface="微软雅黑" charset="0"/>
-                <a:ea typeface="微软雅黑" charset="0"/>
-                <a:cs typeface="微软雅黑" charset="0"/>
-              </a:rPr>
-              <a:t>T</a:t>
-            </a:r>
-            <a:r>
-              <a:rPr lang="zh-CN" altLang="en-US" sz="1400" b="1">
-                <a:latin typeface="微软雅黑" charset="0"/>
-                <a:ea typeface="微软雅黑" charset="0"/>
-                <a:cs typeface="微软雅黑" charset="0"/>
-              </a:rPr>
-              <a:t>，</a:t>
-            </a:r>
-            <a:r>
-              <a:rPr lang="en-US" altLang="zh-CN" sz="1400" b="1">
-                <a:latin typeface="微软雅黑" charset="0"/>
-                <a:ea typeface="微软雅黑" charset="0"/>
-                <a:cs typeface="微软雅黑" charset="0"/>
-              </a:rPr>
-              <a:t>T</a:t>
-            </a:r>
-            <a:r>
-              <a:rPr lang="zh-CN" altLang="en-US" sz="1400" b="1">
-                <a:latin typeface="微软雅黑" charset="0"/>
-                <a:ea typeface="微软雅黑" charset="0"/>
-                <a:cs typeface="微软雅黑" charset="0"/>
-              </a:rPr>
-              <a:t>能看见</a:t>
-            </a:r>
-            <a:r>
-              <a:rPr lang="en-US" altLang="zh-CN" sz="1400" b="1">
-                <a:latin typeface="微软雅黑" charset="0"/>
-                <a:ea typeface="微软雅黑" charset="0"/>
-                <a:cs typeface="微软雅黑" charset="0"/>
-              </a:rPr>
-              <a:t>Q</a:t>
-            </a:r>
-            <a:endParaRPr lang="en-US" altLang="zh-CN" sz="1400" b="1">
-              <a:latin typeface="微软雅黑" charset="0"/>
-              <a:ea typeface="微软雅黑" charset="0"/>
-              <a:cs typeface="微软雅黑" charset="0"/>
-            </a:endParaRPr>
-          </a:p>
-          <a:p>
-            <a:pPr algn="ctr"/>
-            <a:r>
-              <a:rPr lang="en-US" altLang="zh-CN" sz="1400" b="1">
-                <a:latin typeface="微软雅黑" charset="0"/>
-                <a:ea typeface="微软雅黑" charset="0"/>
-                <a:cs typeface="微软雅黑" charset="0"/>
-              </a:rPr>
-              <a:t>T</a:t>
-            </a:r>
-            <a:r>
-              <a:rPr lang="zh-CN" altLang="en-US" sz="1400" b="1">
-                <a:latin typeface="微软雅黑" charset="0"/>
-                <a:ea typeface="微软雅黑" charset="0"/>
-                <a:cs typeface="微软雅黑" charset="0"/>
-              </a:rPr>
-              <a:t>看不到未来</a:t>
-            </a:r>
-            <a:br>
-              <a:rPr lang="en-US" altLang="zh-CN" sz="1400" b="1">
-                <a:latin typeface="微软雅黑" charset="0"/>
-                <a:ea typeface="微软雅黑" charset="0"/>
-                <a:cs typeface="微软雅黑" charset="0"/>
-              </a:rPr>
-            </a:br>
-            <a:endParaRPr lang="zh-CN" altLang="en-US" sz="1400" b="1">
-              <a:latin typeface="微软雅黑" charset="0"/>
-              <a:ea typeface="微软雅黑" charset="0"/>
-              <a:cs typeface="微软雅黑" charset="0"/>
-            </a:endParaRPr>
-          </a:p>
-        </p:txBody>
-      </p:sp>
-      <p:sp>
-        <p:nvSpPr>
-          <p:cNvPr id="22" name="文本框 21"/>
-          <p:cNvSpPr txBox="1"/>
-          <p:nvPr>
-            <p:custDataLst>
-              <p:tags r:id="rId17"/>
-            </p:custDataLst>
-          </p:nvPr>
-        </p:nvSpPr>
-        <p:spPr>
-          <a:xfrm>
-            <a:off x="8634730" y="2734310"/>
-            <a:ext cx="2345690" cy="918845"/>
-          </a:xfrm>
-          <a:prstGeom prst="rect">
-            <a:avLst/>
-          </a:prstGeom>
-          <a:noFill/>
-        </p:spPr>
-        <p:txBody>
-          <a:bodyPr wrap="square" rtlCol="0">
-            <a:noAutofit/>
-          </a:bodyPr>
-          <a:p>
-            <a:pPr algn="ctr"/>
-            <a:r>
-              <a:rPr lang="zh-CN" altLang="en-US" sz="1400" b="1">
-                <a:latin typeface="微软雅黑" charset="0"/>
-                <a:ea typeface="微软雅黑" charset="0"/>
-                <a:cs typeface="微软雅黑" charset="0"/>
-              </a:rPr>
-              <a:t>在文本前加</a:t>
-            </a:r>
-            <a:r>
-              <a:rPr lang="en-US" altLang="zh-CN" sz="1400" b="1">
-                <a:latin typeface="微软雅黑" charset="0"/>
-                <a:ea typeface="微软雅黑" charset="0"/>
-                <a:cs typeface="微软雅黑" charset="0"/>
-              </a:rPr>
-              <a:t>[DEC]</a:t>
-            </a:r>
-            <a:br>
-              <a:rPr lang="en-US" altLang="zh-CN" sz="1400" b="1">
-                <a:latin typeface="微软雅黑" charset="0"/>
-                <a:ea typeface="微软雅黑" charset="0"/>
-                <a:cs typeface="微软雅黑" charset="0"/>
-              </a:rPr>
-            </a:br>
-            <a:r>
-              <a:rPr lang="zh-CN" altLang="en-US" sz="1400" b="1">
-                <a:latin typeface="微软雅黑" charset="0"/>
-                <a:ea typeface="微软雅黑" charset="0"/>
-                <a:cs typeface="微软雅黑" charset="0"/>
-              </a:rPr>
-              <a:t>代表生成</a:t>
-            </a:r>
-            <a:r>
-              <a:rPr lang="zh-CN" altLang="en-US" sz="1400" b="1">
-                <a:latin typeface="微软雅黑" charset="0"/>
-                <a:ea typeface="微软雅黑" charset="0"/>
-                <a:cs typeface="微软雅黑" charset="0"/>
-              </a:rPr>
-              <a:t>任务</a:t>
-            </a:r>
-            <a:endParaRPr lang="zh-CN" altLang="en-US" sz="1400" b="1">
-              <a:latin typeface="微软雅黑" charset="0"/>
-              <a:ea typeface="微软雅黑" charset="0"/>
-              <a:cs typeface="微软雅黑" charset="0"/>
-            </a:endParaRPr>
-          </a:p>
-        </p:txBody>
-      </p:sp>
-    </p:spTree>
-  </p:cSld>
-  <p:clrMapOvr>
-    <a:masterClrMapping/>
-  </p:clrMapOvr>
-</p:sld>
-</file>
-
-<file path=ppt/slides/slide19.xml><?xml version="1.0" encoding="utf-8"?>
-<p:sld xmlns:a="http://schemas.openxmlformats.org/drawingml/2006/main" xmlns:r="http://schemas.openxmlformats.org/officeDocument/2006/relationships" xmlns:p="http://schemas.openxmlformats.org/presentationml/2006/main">
-  <p:cSld>
-    <p:spTree>
-      <p:nvGrpSpPr>
-        <p:cNvPr id="1" name=""/>
-        <p:cNvGrpSpPr/>
-        <p:nvPr/>
-      </p:nvGrpSpPr>
-      <p:grpSpPr/>
-      <p:pic>
-        <p:nvPicPr>
           <p:cNvPr id="13" name="图片 12"/>
           <p:cNvPicPr>
             <a:picLocks noChangeAspect="1"/>
@@ -12217,6 +10695,209 @@
               <a:ea typeface="微软雅黑" charset="0"/>
               <a:cs typeface="微软雅黑" charset="0"/>
             </a:endParaRPr>
+          </a:p>
+        </p:txBody>
+      </p:sp>
+      <p:sp>
+        <p:nvSpPr>
+          <p:cNvPr id="43" name="文本框 42"/>
+          <p:cNvSpPr txBox="1"/>
+          <p:nvPr>
+            <p:custDataLst>
+              <p:tags r:id="rId37"/>
+            </p:custDataLst>
+          </p:nvPr>
+        </p:nvSpPr>
+        <p:spPr>
+          <a:xfrm>
+            <a:off x="9700260" y="381000"/>
+            <a:ext cx="2509520" cy="1011555"/>
+          </a:xfrm>
+          <a:prstGeom prst="rect">
+            <a:avLst/>
+          </a:prstGeom>
+          <a:noFill/>
+        </p:spPr>
+        <p:txBody>
+          <a:bodyPr wrap="square" rtlCol="0">
+            <a:noAutofit/>
+          </a:bodyPr>
+          <a:p>
+            <a:pPr algn="ctr"/>
+            <a:r>
+              <a:rPr lang="en-US" altLang="zh-CN" sz="4400" b="1">
+                <a:latin typeface="微软雅黑" charset="0"/>
+                <a:ea typeface="微软雅黑" charset="0"/>
+                <a:cs typeface="微软雅黑" charset="0"/>
+              </a:rPr>
+              <a:t>BILP-2</a:t>
+            </a:r>
+            <a:endParaRPr lang="en-US" altLang="zh-CN" sz="4400" b="1">
+              <a:latin typeface="微软雅黑" charset="0"/>
+              <a:ea typeface="微软雅黑" charset="0"/>
+              <a:cs typeface="微软雅黑" charset="0"/>
+            </a:endParaRPr>
+          </a:p>
+        </p:txBody>
+      </p:sp>
+      <p:sp>
+        <p:nvSpPr>
+          <p:cNvPr id="44" name="文本框 43"/>
+          <p:cNvSpPr txBox="1"/>
+          <p:nvPr>
+            <p:custDataLst>
+              <p:tags r:id="rId38"/>
+            </p:custDataLst>
+          </p:nvPr>
+        </p:nvSpPr>
+        <p:spPr>
+          <a:xfrm>
+            <a:off x="9473565" y="1343025"/>
+            <a:ext cx="2509520" cy="1011555"/>
+          </a:xfrm>
+          <a:prstGeom prst="rect">
+            <a:avLst/>
+          </a:prstGeom>
+          <a:noFill/>
+        </p:spPr>
+        <p:txBody>
+          <a:bodyPr wrap="square" rtlCol="0">
+            <a:noAutofit/>
+          </a:bodyPr>
+          <a:p>
+            <a:pPr algn="ctr"/>
+            <a:r>
+              <a:rPr lang="zh-CN" altLang="en-US" sz="1400" b="1">
+                <a:solidFill>
+                  <a:srgbClr val="C00000"/>
+                </a:solidFill>
+                <a:latin typeface="微软雅黑" charset="0"/>
+                <a:ea typeface="微软雅黑" charset="0"/>
+                <a:cs typeface="微软雅黑" charset="0"/>
+              </a:rPr>
+              <a:t>分步</a:t>
+            </a:r>
+            <a:r>
+              <a:rPr lang="zh-CN" altLang="en-US" sz="1400" b="1">
+                <a:solidFill>
+                  <a:srgbClr val="C00000"/>
+                </a:solidFill>
+                <a:latin typeface="微软雅黑" charset="0"/>
+                <a:ea typeface="微软雅黑" charset="0"/>
+                <a:cs typeface="微软雅黑" charset="0"/>
+              </a:rPr>
+              <a:t>训练</a:t>
+            </a:r>
+            <a:endParaRPr lang="zh-CN" altLang="en-US" sz="1400" b="1">
+              <a:solidFill>
+                <a:srgbClr val="C00000"/>
+              </a:solidFill>
+              <a:latin typeface="微软雅黑" charset="0"/>
+              <a:ea typeface="微软雅黑" charset="0"/>
+              <a:cs typeface="微软雅黑" charset="0"/>
+            </a:endParaRPr>
+          </a:p>
+          <a:p>
+            <a:pPr algn="ctr"/>
+            <a:r>
+              <a:rPr lang="en-US" altLang="zh-CN" sz="1400" b="1">
+                <a:solidFill>
+                  <a:srgbClr val="C00000"/>
+                </a:solidFill>
+                <a:latin typeface="微软雅黑" charset="0"/>
+                <a:ea typeface="微软雅黑" charset="0"/>
+                <a:cs typeface="微软雅黑" charset="0"/>
+              </a:rPr>
+              <a:t>Step1: Q-Former(Image Encoder)</a:t>
+            </a:r>
+            <a:endParaRPr lang="en-US" altLang="zh-CN" sz="1400" b="1">
+              <a:solidFill>
+                <a:srgbClr val="C00000"/>
+              </a:solidFill>
+              <a:latin typeface="微软雅黑" charset="0"/>
+              <a:ea typeface="微软雅黑" charset="0"/>
+              <a:cs typeface="微软雅黑" charset="0"/>
+            </a:endParaRPr>
+          </a:p>
+          <a:p>
+            <a:pPr algn="ctr"/>
+            <a:r>
+              <a:rPr lang="en-US" altLang="zh-CN" sz="1400" b="1">
+                <a:solidFill>
+                  <a:srgbClr val="C00000"/>
+                </a:solidFill>
+                <a:latin typeface="微软雅黑" charset="0"/>
+                <a:ea typeface="微软雅黑" charset="0"/>
+                <a:cs typeface="微软雅黑" charset="0"/>
+              </a:rPr>
+              <a:t>Step2: Q-Former(LLM)</a:t>
+            </a:r>
+            <a:endParaRPr lang="en-US" altLang="zh-CN" sz="1400" b="1">
+              <a:solidFill>
+                <a:srgbClr val="C00000"/>
+              </a:solidFill>
+              <a:latin typeface="微软雅黑" charset="0"/>
+              <a:ea typeface="微软雅黑" charset="0"/>
+              <a:cs typeface="微软雅黑" charset="0"/>
+            </a:endParaRPr>
+          </a:p>
+        </p:txBody>
+      </p:sp>
+    </p:spTree>
+  </p:cSld>
+  <p:clrMapOvr>
+    <a:masterClrMapping/>
+  </p:clrMapOvr>
+</p:sld>
+</file>
+
+<file path=ppt/slides/slide19.xml><?xml version="1.0" encoding="utf-8"?>
+<p:sld xmlns:a="http://schemas.openxmlformats.org/drawingml/2006/main" xmlns:r="http://schemas.openxmlformats.org/officeDocument/2006/relationships" xmlns:p="http://schemas.openxmlformats.org/presentationml/2006/main">
+  <p:cSld>
+    <p:spTree>
+      <p:nvGrpSpPr>
+        <p:cNvPr id="1" name=""/>
+        <p:cNvGrpSpPr/>
+        <p:nvPr/>
+      </p:nvGrpSpPr>
+      <p:grpSpPr/>
+      <p:sp>
+        <p:nvSpPr>
+          <p:cNvPr id="2" name="标题 1"/>
+          <p:cNvSpPr>
+            <a:spLocks noGrp="1"/>
+          </p:cNvSpPr>
+          <p:nvPr>
+            <p:ph type="ctrTitle"/>
+          </p:nvPr>
+        </p:nvSpPr>
+        <p:spPr/>
+        <p:txBody>
+          <a:bodyPr/>
+          <a:p>
+            <a:r>
+              <a:rPr lang="en-US" altLang="zh-CN"/>
+              <a:t>Flamingo</a:t>
+            </a:r>
+            <a:endParaRPr lang="en-US" altLang="zh-CN"/>
+          </a:p>
+        </p:txBody>
+      </p:sp>
+      <p:sp>
+        <p:nvSpPr>
+          <p:cNvPr id="3" name="副标题 2"/>
+          <p:cNvSpPr>
+            <a:spLocks noGrp="1"/>
+          </p:cNvSpPr>
+          <p:nvPr>
+            <p:ph type="subTitle" idx="1"/>
+          </p:nvPr>
+        </p:nvSpPr>
+        <p:spPr/>
+        <p:txBody>
+          <a:bodyPr/>
+          <a:p>
+            <a:endParaRPr lang="zh-CN" altLang="en-US"/>
           </a:p>
         </p:txBody>
       </p:sp>
@@ -12418,6 +11099,1321 @@
 </p:sld>
 </file>
 
+<file path=ppt/slides/slide20.xml><?xml version="1.0" encoding="utf-8"?>
+<p:sld xmlns:a="http://schemas.openxmlformats.org/drawingml/2006/main" xmlns:r="http://schemas.openxmlformats.org/officeDocument/2006/relationships" xmlns:p="http://schemas.openxmlformats.org/presentationml/2006/main">
+  <p:cSld>
+    <p:spTree>
+      <p:nvGrpSpPr>
+        <p:cNvPr id="1" name=""/>
+        <p:cNvGrpSpPr/>
+        <p:nvPr/>
+      </p:nvGrpSpPr>
+      <p:grpSpPr/>
+      <p:pic>
+        <p:nvPicPr>
+          <p:cNvPr id="5" name="图片 4"/>
+          <p:cNvPicPr>
+            <a:picLocks noChangeAspect="1"/>
+          </p:cNvPicPr>
+          <p:nvPr>
+            <p:custDataLst>
+              <p:tags r:id="rId1"/>
+            </p:custDataLst>
+          </p:nvPr>
+        </p:nvPicPr>
+        <p:blipFill>
+          <a:blip r:embed="rId2"/>
+          <a:stretch>
+            <a:fillRect/>
+          </a:stretch>
+        </p:blipFill>
+        <p:spPr>
+          <a:xfrm>
+            <a:off x="5344795" y="3157220"/>
+            <a:ext cx="6847840" cy="2882265"/>
+          </a:xfrm>
+          <a:prstGeom prst="rect">
+            <a:avLst/>
+          </a:prstGeom>
+        </p:spPr>
+      </p:pic>
+      <p:pic>
+        <p:nvPicPr>
+          <p:cNvPr id="4" name="图片 3"/>
+          <p:cNvPicPr>
+            <a:picLocks noChangeAspect="1"/>
+          </p:cNvPicPr>
+          <p:nvPr>
+            <p:custDataLst>
+              <p:tags r:id="rId3"/>
+            </p:custDataLst>
+          </p:nvPr>
+        </p:nvPicPr>
+        <p:blipFill>
+          <a:blip r:embed="rId4"/>
+          <a:stretch>
+            <a:fillRect/>
+          </a:stretch>
+        </p:blipFill>
+        <p:spPr>
+          <a:xfrm>
+            <a:off x="260350" y="2783205"/>
+            <a:ext cx="5084445" cy="3789680"/>
+          </a:xfrm>
+          <a:prstGeom prst="rect">
+            <a:avLst/>
+          </a:prstGeom>
+        </p:spPr>
+      </p:pic>
+      <p:sp>
+        <p:nvSpPr>
+          <p:cNvPr id="18" name="文本框 17"/>
+          <p:cNvSpPr txBox="1"/>
+          <p:nvPr>
+            <p:custDataLst>
+              <p:tags r:id="rId5"/>
+            </p:custDataLst>
+          </p:nvPr>
+        </p:nvSpPr>
+        <p:spPr>
+          <a:xfrm>
+            <a:off x="1332230" y="6118860"/>
+            <a:ext cx="2456815" cy="660400"/>
+          </a:xfrm>
+          <a:prstGeom prst="rect">
+            <a:avLst/>
+          </a:prstGeom>
+          <a:noFill/>
+        </p:spPr>
+        <p:txBody>
+          <a:bodyPr wrap="square" rtlCol="0">
+            <a:noAutofit/>
+          </a:bodyPr>
+          <a:p>
+            <a:pPr algn="ctr"/>
+            <a:r>
+              <a:rPr lang="en-US" altLang="zh-CN" sz="1200" b="1">
+                <a:latin typeface="微软雅黑" charset="0"/>
+                <a:ea typeface="微软雅黑" charset="0"/>
+                <a:cs typeface="微软雅黑" charset="0"/>
+              </a:rPr>
+              <a:t>CA</a:t>
+            </a:r>
+            <a:r>
+              <a:rPr lang="zh-CN" altLang="en-US" sz="1200" b="1">
+                <a:latin typeface="微软雅黑" charset="0"/>
+                <a:ea typeface="微软雅黑" charset="0"/>
+                <a:cs typeface="微软雅黑" charset="0"/>
+              </a:rPr>
+              <a:t>部分</a:t>
+            </a:r>
+            <a:br>
+              <a:rPr lang="zh-CN" altLang="en-US" sz="1200" b="1">
+                <a:latin typeface="微软雅黑" charset="0"/>
+                <a:ea typeface="微软雅黑" charset="0"/>
+                <a:cs typeface="微软雅黑" charset="0"/>
+              </a:rPr>
+            </a:br>
+            <a:r>
+              <a:rPr lang="en-US" altLang="zh-CN" sz="1200" b="1">
+                <a:latin typeface="微软雅黑" charset="0"/>
+                <a:ea typeface="微软雅黑" charset="0"/>
+                <a:cs typeface="微软雅黑" charset="0"/>
+              </a:rPr>
+              <a:t>Q</a:t>
+            </a:r>
+            <a:r>
+              <a:rPr lang="zh-CN" altLang="en-US" sz="1200" b="1">
+                <a:latin typeface="微软雅黑" charset="0"/>
+                <a:ea typeface="微软雅黑" charset="0"/>
+                <a:cs typeface="微软雅黑" charset="0"/>
+              </a:rPr>
+              <a:t>来自</a:t>
+            </a:r>
+            <a:r>
+              <a:rPr lang="en-US" altLang="zh-CN" sz="1200" b="1">
+                <a:latin typeface="微软雅黑" charset="0"/>
+                <a:ea typeface="微软雅黑" charset="0"/>
+                <a:cs typeface="微软雅黑" charset="0"/>
+              </a:rPr>
+              <a:t>64</a:t>
+            </a:r>
+            <a:r>
+              <a:rPr lang="zh-CN" altLang="en-US" sz="1200" b="1">
+                <a:latin typeface="微软雅黑" charset="0"/>
+                <a:ea typeface="微软雅黑" charset="0"/>
+                <a:cs typeface="微软雅黑" charset="0"/>
+              </a:rPr>
+              <a:t>个可学习的</a:t>
+            </a:r>
+            <a:r>
+              <a:rPr lang="en-US" altLang="zh-CN" sz="1200" b="1">
+                <a:latin typeface="微软雅黑" charset="0"/>
+                <a:ea typeface="微软雅黑" charset="0"/>
+                <a:cs typeface="微软雅黑" charset="0"/>
+              </a:rPr>
+              <a:t>token</a:t>
+            </a:r>
+            <a:br>
+              <a:rPr lang="en-US" altLang="zh-CN" sz="1200" b="1">
+                <a:latin typeface="微软雅黑" charset="0"/>
+                <a:ea typeface="微软雅黑" charset="0"/>
+                <a:cs typeface="微软雅黑" charset="0"/>
+              </a:rPr>
+            </a:br>
+            <a:r>
+              <a:rPr lang="en-US" altLang="zh-CN" sz="1200" b="1">
+                <a:latin typeface="微软雅黑" charset="0"/>
+                <a:ea typeface="微软雅黑" charset="0"/>
+                <a:cs typeface="微软雅黑" charset="0"/>
+              </a:rPr>
+              <a:t>KV</a:t>
+            </a:r>
+            <a:r>
+              <a:rPr lang="zh-CN" altLang="en-US" sz="1200" b="1">
+                <a:latin typeface="微软雅黑" charset="0"/>
+                <a:ea typeface="微软雅黑" charset="0"/>
+                <a:cs typeface="微软雅黑" charset="0"/>
+              </a:rPr>
+              <a:t>来自</a:t>
+            </a:r>
+            <a:r>
+              <a:rPr lang="en-US" altLang="zh-CN" sz="1200" b="1">
+                <a:latin typeface="微软雅黑" charset="0"/>
+                <a:ea typeface="微软雅黑" charset="0"/>
+                <a:cs typeface="微软雅黑" charset="0"/>
+              </a:rPr>
+              <a:t>ResNet</a:t>
+            </a:r>
+            <a:r>
+              <a:rPr lang="zh-CN" altLang="en-US" sz="1200" b="1">
+                <a:latin typeface="微软雅黑" charset="0"/>
+                <a:ea typeface="微软雅黑" charset="0"/>
+                <a:cs typeface="微软雅黑" charset="0"/>
+              </a:rPr>
+              <a:t>提取的</a:t>
+            </a:r>
+            <a:r>
+              <a:rPr lang="zh-CN" altLang="en-US" sz="1200" b="1">
+                <a:latin typeface="微软雅黑" charset="0"/>
+                <a:ea typeface="微软雅黑" charset="0"/>
+                <a:cs typeface="微软雅黑" charset="0"/>
+              </a:rPr>
+              <a:t>图像特征</a:t>
+            </a:r>
+            <a:endParaRPr lang="zh-CN" altLang="en-US" sz="1200" b="1">
+              <a:latin typeface="微软雅黑" charset="0"/>
+              <a:ea typeface="微软雅黑" charset="0"/>
+              <a:cs typeface="微软雅黑" charset="0"/>
+            </a:endParaRPr>
+          </a:p>
+        </p:txBody>
+      </p:sp>
+      <p:sp>
+        <p:nvSpPr>
+          <p:cNvPr id="6" name="文本框 5"/>
+          <p:cNvSpPr txBox="1"/>
+          <p:nvPr>
+            <p:custDataLst>
+              <p:tags r:id="rId6"/>
+            </p:custDataLst>
+          </p:nvPr>
+        </p:nvSpPr>
+        <p:spPr>
+          <a:xfrm>
+            <a:off x="7104380" y="5883275"/>
+            <a:ext cx="4620260" cy="853440"/>
+          </a:xfrm>
+          <a:prstGeom prst="rect">
+            <a:avLst/>
+          </a:prstGeom>
+          <a:noFill/>
+        </p:spPr>
+        <p:txBody>
+          <a:bodyPr wrap="square" rtlCol="0">
+            <a:noAutofit/>
+          </a:bodyPr>
+          <a:p>
+            <a:pPr algn="ctr"/>
+            <a:r>
+              <a:rPr lang="en-US" altLang="zh-CN" sz="1200" b="1">
+                <a:latin typeface="微软雅黑" charset="0"/>
+                <a:ea typeface="微软雅黑" charset="0"/>
+                <a:cs typeface="微软雅黑" charset="0"/>
+              </a:rPr>
+              <a:t>tanh gating</a:t>
+            </a:r>
+            <a:br>
+              <a:rPr lang="en-US" altLang="zh-CN" sz="1200" b="1">
+                <a:latin typeface="微软雅黑" charset="0"/>
+                <a:ea typeface="微软雅黑" charset="0"/>
+                <a:cs typeface="微软雅黑" charset="0"/>
+              </a:rPr>
+            </a:br>
+            <a:r>
+              <a:rPr lang="zh-CN" altLang="en-US" sz="1200" b="1">
+                <a:latin typeface="微软雅黑" charset="0"/>
+                <a:ea typeface="微软雅黑" charset="0"/>
+                <a:cs typeface="微软雅黑" charset="0"/>
+              </a:rPr>
+              <a:t>标量</a:t>
+            </a:r>
+            <a:br>
+              <a:rPr lang="en-US" altLang="zh-CN" sz="1200" b="1">
+                <a:latin typeface="微软雅黑" charset="0"/>
+                <a:ea typeface="微软雅黑" charset="0"/>
+                <a:cs typeface="微软雅黑" charset="0"/>
+              </a:rPr>
+            </a:br>
+            <a:r>
+              <a:rPr lang="zh-CN" altLang="en-US" sz="1200" b="1">
+                <a:latin typeface="微软雅黑" charset="0"/>
+                <a:ea typeface="微软雅黑" charset="0"/>
+                <a:cs typeface="微软雅黑" charset="0"/>
+              </a:rPr>
+              <a:t>作用是让刚开始训练时</a:t>
+            </a:r>
+            <a:r>
+              <a:rPr lang="en-US" altLang="zh-CN" sz="1200" b="1">
+                <a:latin typeface="微软雅黑" charset="0"/>
+                <a:ea typeface="微软雅黑" charset="0"/>
+                <a:cs typeface="微软雅黑" charset="0"/>
+              </a:rPr>
+              <a:t>CA</a:t>
+            </a:r>
+            <a:r>
+              <a:rPr lang="zh-CN" altLang="en-US" sz="1200" b="1">
+                <a:latin typeface="微软雅黑" charset="0"/>
+                <a:ea typeface="微软雅黑" charset="0"/>
+                <a:cs typeface="微软雅黑" charset="0"/>
+              </a:rPr>
+              <a:t>参数置零（不起作用）</a:t>
+            </a:r>
+            <a:br>
+              <a:rPr lang="zh-CN" altLang="en-US" sz="1200" b="1">
+                <a:latin typeface="微软雅黑" charset="0"/>
+                <a:ea typeface="微软雅黑" charset="0"/>
+                <a:cs typeface="微软雅黑" charset="0"/>
+              </a:rPr>
+            </a:br>
+            <a:r>
+              <a:rPr lang="zh-CN" altLang="en-US" sz="1200" b="1">
+                <a:latin typeface="微软雅黑" charset="0"/>
+                <a:ea typeface="微软雅黑" charset="0"/>
+                <a:cs typeface="微软雅黑" charset="0"/>
+              </a:rPr>
+              <a:t>开始学习只有文本特征</a:t>
+            </a:r>
+            <a:r>
+              <a:rPr lang="en-US" altLang="zh-CN" sz="1200" b="1">
+                <a:latin typeface="微软雅黑" charset="0"/>
+                <a:ea typeface="微软雅黑" charset="0"/>
+                <a:cs typeface="微软雅黑" charset="0"/>
+              </a:rPr>
+              <a:t>(CA</a:t>
+            </a:r>
+            <a:r>
+              <a:rPr lang="zh-CN" altLang="en-US" sz="1200" b="1">
+                <a:latin typeface="微软雅黑" charset="0"/>
+                <a:ea typeface="微软雅黑" charset="0"/>
+                <a:cs typeface="微软雅黑" charset="0"/>
+              </a:rPr>
+              <a:t>不起作用，文本残差链接</a:t>
+            </a:r>
+            <a:r>
+              <a:rPr lang="en-US" altLang="zh-CN" sz="1200" b="1">
+                <a:latin typeface="微软雅黑" charset="0"/>
+                <a:ea typeface="微软雅黑" charset="0"/>
+                <a:cs typeface="微软雅黑" charset="0"/>
+              </a:rPr>
+              <a:t>)</a:t>
+            </a:r>
+            <a:br>
+              <a:rPr lang="en-US" altLang="zh-CN" sz="1200" b="1">
+                <a:latin typeface="微软雅黑" charset="0"/>
+                <a:ea typeface="微软雅黑" charset="0"/>
+                <a:cs typeface="微软雅黑" charset="0"/>
+              </a:rPr>
+            </a:br>
+            <a:r>
+              <a:rPr lang="zh-CN" altLang="en-US" sz="1200" b="1">
+                <a:latin typeface="微软雅黑" charset="0"/>
+                <a:ea typeface="微软雅黑" charset="0"/>
+                <a:cs typeface="微软雅黑" charset="0"/>
+              </a:rPr>
+              <a:t>随着学习</a:t>
+            </a:r>
+            <a:r>
+              <a:rPr lang="en-US" altLang="zh-CN" sz="1200" b="1">
+                <a:latin typeface="微软雅黑" charset="0"/>
+                <a:ea typeface="微软雅黑" charset="0"/>
+                <a:cs typeface="微软雅黑" charset="0"/>
+              </a:rPr>
+              <a:t>tanh</a:t>
+            </a:r>
+            <a:r>
+              <a:rPr lang="zh-CN" altLang="en-US" sz="1200" b="1">
+                <a:latin typeface="微软雅黑" charset="0"/>
+                <a:ea typeface="微软雅黑" charset="0"/>
+                <a:cs typeface="微软雅黑" charset="0"/>
+              </a:rPr>
+              <a:t>逐渐不是</a:t>
+            </a:r>
+            <a:r>
+              <a:rPr lang="en-US" altLang="zh-CN" sz="1200" b="1">
+                <a:latin typeface="微软雅黑" charset="0"/>
+                <a:ea typeface="微软雅黑" charset="0"/>
+                <a:cs typeface="微软雅黑" charset="0"/>
+              </a:rPr>
+              <a:t>0</a:t>
+            </a:r>
+            <a:r>
+              <a:rPr lang="zh-CN" altLang="en-US" sz="1200" b="1">
+                <a:latin typeface="微软雅黑" charset="0"/>
+                <a:ea typeface="微软雅黑" charset="0"/>
+                <a:cs typeface="微软雅黑" charset="0"/>
+              </a:rPr>
+              <a:t>，相当于逐渐引入图像信息（</a:t>
+            </a:r>
+            <a:r>
+              <a:rPr lang="en-US" altLang="zh-CN" sz="1200" b="1">
+                <a:latin typeface="微软雅黑" charset="0"/>
+                <a:ea typeface="微软雅黑" charset="0"/>
+                <a:cs typeface="微软雅黑" charset="0"/>
+              </a:rPr>
+              <a:t>CA</a:t>
+            </a:r>
+            <a:r>
+              <a:rPr lang="zh-CN" altLang="en-US" sz="1200" b="1">
+                <a:latin typeface="微软雅黑" charset="0"/>
+                <a:ea typeface="微软雅黑" charset="0"/>
+                <a:cs typeface="微软雅黑" charset="0"/>
+              </a:rPr>
+              <a:t>）</a:t>
+            </a:r>
+            <a:endParaRPr lang="zh-CN" altLang="en-US" sz="1200" b="1">
+              <a:latin typeface="微软雅黑" charset="0"/>
+              <a:ea typeface="微软雅黑" charset="0"/>
+              <a:cs typeface="微软雅黑" charset="0"/>
+            </a:endParaRPr>
+          </a:p>
+        </p:txBody>
+      </p:sp>
+      <p:pic>
+        <p:nvPicPr>
+          <p:cNvPr id="7" name="图片 6"/>
+          <p:cNvPicPr>
+            <a:picLocks noChangeAspect="1"/>
+          </p:cNvPicPr>
+          <p:nvPr>
+            <p:custDataLst>
+              <p:tags r:id="rId7"/>
+            </p:custDataLst>
+          </p:nvPr>
+        </p:nvPicPr>
+        <p:blipFill>
+          <a:blip r:embed="rId8"/>
+          <a:stretch>
+            <a:fillRect/>
+          </a:stretch>
+        </p:blipFill>
+        <p:spPr>
+          <a:xfrm>
+            <a:off x="2640330" y="13970"/>
+            <a:ext cx="6706235" cy="3143250"/>
+          </a:xfrm>
+          <a:prstGeom prst="rect">
+            <a:avLst/>
+          </a:prstGeom>
+        </p:spPr>
+      </p:pic>
+      <p:sp>
+        <p:nvSpPr>
+          <p:cNvPr id="41" name="矩形: 圆角 36"/>
+          <p:cNvSpPr/>
+          <p:nvPr>
+            <p:custDataLst>
+              <p:tags r:id="rId9"/>
+            </p:custDataLst>
+          </p:nvPr>
+        </p:nvSpPr>
+        <p:spPr>
+          <a:xfrm rot="10800000" flipV="1">
+            <a:off x="2782570" y="871855"/>
+            <a:ext cx="2744470" cy="1413510"/>
+          </a:xfrm>
+          <a:prstGeom prst="roundRect">
+            <a:avLst>
+              <a:gd name="adj" fmla="val 10039"/>
+            </a:avLst>
+          </a:prstGeom>
+          <a:noFill/>
+          <a:ln w="38100">
+            <a:solidFill>
+              <a:schemeClr val="tx1"/>
+            </a:solidFill>
+            <a:prstDash val="lgDash"/>
+          </a:ln>
+        </p:spPr>
+        <p:style>
+          <a:lnRef idx="2">
+            <a:schemeClr val="accent1">
+              <a:shade val="15000"/>
+            </a:schemeClr>
+          </a:lnRef>
+          <a:fillRef idx="1">
+            <a:schemeClr val="accent1"/>
+          </a:fillRef>
+          <a:effectRef idx="0">
+            <a:schemeClr val="accent1"/>
+          </a:effectRef>
+          <a:fontRef idx="minor">
+            <a:schemeClr val="lt1"/>
+          </a:fontRef>
+        </p:style>
+        <p:txBody>
+          <a:bodyPr rtlCol="0" anchor="ctr"/>
+          <a:p>
+            <a:pPr algn="ctr"/>
+            <a:endParaRPr lang="zh-CN" altLang="en-US"/>
+          </a:p>
+        </p:txBody>
+      </p:sp>
+      <p:sp>
+        <p:nvSpPr>
+          <p:cNvPr id="8" name="矩形: 圆角 36"/>
+          <p:cNvSpPr/>
+          <p:nvPr>
+            <p:custDataLst>
+              <p:tags r:id="rId10"/>
+            </p:custDataLst>
+          </p:nvPr>
+        </p:nvSpPr>
+        <p:spPr>
+          <a:xfrm rot="10800000" flipV="1">
+            <a:off x="6096635" y="1291590"/>
+            <a:ext cx="2743835" cy="564515"/>
+          </a:xfrm>
+          <a:prstGeom prst="roundRect">
+            <a:avLst>
+              <a:gd name="adj" fmla="val 10039"/>
+            </a:avLst>
+          </a:prstGeom>
+          <a:noFill/>
+          <a:ln w="38100">
+            <a:solidFill>
+              <a:schemeClr val="tx1"/>
+            </a:solidFill>
+            <a:prstDash val="lgDash"/>
+          </a:ln>
+        </p:spPr>
+        <p:style>
+          <a:lnRef idx="2">
+            <a:schemeClr val="accent1">
+              <a:shade val="15000"/>
+            </a:schemeClr>
+          </a:lnRef>
+          <a:fillRef idx="1">
+            <a:schemeClr val="accent1"/>
+          </a:fillRef>
+          <a:effectRef idx="0">
+            <a:schemeClr val="accent1"/>
+          </a:effectRef>
+          <a:fontRef idx="minor">
+            <a:schemeClr val="lt1"/>
+          </a:fontRef>
+        </p:style>
+        <p:txBody>
+          <a:bodyPr rtlCol="0" anchor="ctr"/>
+          <a:p>
+            <a:pPr algn="ctr"/>
+            <a:endParaRPr lang="zh-CN" altLang="en-US"/>
+          </a:p>
+        </p:txBody>
+      </p:sp>
+      <p:sp>
+        <p:nvSpPr>
+          <p:cNvPr id="10" name="矩形: 圆角 36"/>
+          <p:cNvSpPr/>
+          <p:nvPr>
+            <p:custDataLst>
+              <p:tags r:id="rId11"/>
+            </p:custDataLst>
+          </p:nvPr>
+        </p:nvSpPr>
+        <p:spPr>
+          <a:xfrm rot="10800000" flipV="1">
+            <a:off x="0" y="3067685"/>
+            <a:ext cx="5189855" cy="3790315"/>
+          </a:xfrm>
+          <a:prstGeom prst="roundRect">
+            <a:avLst>
+              <a:gd name="adj" fmla="val 10039"/>
+            </a:avLst>
+          </a:prstGeom>
+          <a:noFill/>
+          <a:ln w="38100">
+            <a:solidFill>
+              <a:schemeClr val="tx1"/>
+            </a:solidFill>
+            <a:prstDash val="lgDash"/>
+          </a:ln>
+        </p:spPr>
+        <p:style>
+          <a:lnRef idx="2">
+            <a:schemeClr val="accent1">
+              <a:shade val="15000"/>
+            </a:schemeClr>
+          </a:lnRef>
+          <a:fillRef idx="1">
+            <a:schemeClr val="accent1"/>
+          </a:fillRef>
+          <a:effectRef idx="0">
+            <a:schemeClr val="accent1"/>
+          </a:effectRef>
+          <a:fontRef idx="minor">
+            <a:schemeClr val="lt1"/>
+          </a:fontRef>
+        </p:style>
+        <p:txBody>
+          <a:bodyPr rtlCol="0" anchor="ctr"/>
+          <a:p>
+            <a:pPr algn="ctr"/>
+            <a:endParaRPr lang="zh-CN" altLang="en-US"/>
+          </a:p>
+        </p:txBody>
+      </p:sp>
+      <p:sp>
+        <p:nvSpPr>
+          <p:cNvPr id="11" name="矩形: 圆角 36"/>
+          <p:cNvSpPr/>
+          <p:nvPr>
+            <p:custDataLst>
+              <p:tags r:id="rId12"/>
+            </p:custDataLst>
+          </p:nvPr>
+        </p:nvSpPr>
+        <p:spPr>
+          <a:xfrm rot="10800000" flipV="1">
+            <a:off x="5527040" y="3067685"/>
+            <a:ext cx="6664960" cy="3790315"/>
+          </a:xfrm>
+          <a:prstGeom prst="roundRect">
+            <a:avLst>
+              <a:gd name="adj" fmla="val 10039"/>
+            </a:avLst>
+          </a:prstGeom>
+          <a:noFill/>
+          <a:ln w="38100">
+            <a:solidFill>
+              <a:schemeClr val="tx1"/>
+            </a:solidFill>
+            <a:prstDash val="lgDash"/>
+          </a:ln>
+        </p:spPr>
+        <p:style>
+          <a:lnRef idx="2">
+            <a:schemeClr val="accent1">
+              <a:shade val="15000"/>
+            </a:schemeClr>
+          </a:lnRef>
+          <a:fillRef idx="1">
+            <a:schemeClr val="accent1"/>
+          </a:fillRef>
+          <a:effectRef idx="0">
+            <a:schemeClr val="accent1"/>
+          </a:effectRef>
+          <a:fontRef idx="minor">
+            <a:schemeClr val="lt1"/>
+          </a:fontRef>
+        </p:style>
+        <p:txBody>
+          <a:bodyPr rtlCol="0" anchor="ctr"/>
+          <a:p>
+            <a:pPr algn="ctr"/>
+            <a:endParaRPr lang="zh-CN" altLang="en-US"/>
+          </a:p>
+        </p:txBody>
+      </p:sp>
+      <p:cxnSp>
+        <p:nvCxnSpPr>
+          <p:cNvPr id="34" name="直接连接符 33"/>
+          <p:cNvCxnSpPr/>
+          <p:nvPr>
+            <p:custDataLst>
+              <p:tags r:id="rId13"/>
+            </p:custDataLst>
+          </p:nvPr>
+        </p:nvCxnSpPr>
+        <p:spPr>
+          <a:xfrm flipV="1">
+            <a:off x="198120" y="2282190"/>
+            <a:ext cx="2591435" cy="786765"/>
+          </a:xfrm>
+          <a:prstGeom prst="line">
+            <a:avLst/>
+          </a:prstGeom>
+          <a:ln w="38100">
+            <a:solidFill>
+              <a:schemeClr val="tx1"/>
+            </a:solidFill>
+          </a:ln>
+        </p:spPr>
+        <p:style>
+          <a:lnRef idx="2">
+            <a:schemeClr val="accent1"/>
+          </a:lnRef>
+          <a:fillRef idx="0">
+            <a:srgbClr val="FFFFFF"/>
+          </a:fillRef>
+          <a:effectRef idx="0">
+            <a:srgbClr val="FFFFFF"/>
+          </a:effectRef>
+          <a:fontRef idx="minor">
+            <a:schemeClr val="tx1"/>
+          </a:fontRef>
+        </p:style>
+      </p:cxnSp>
+      <p:cxnSp>
+        <p:nvCxnSpPr>
+          <p:cNvPr id="12" name="直接连接符 11"/>
+          <p:cNvCxnSpPr/>
+          <p:nvPr>
+            <p:custDataLst>
+              <p:tags r:id="rId14"/>
+            </p:custDataLst>
+          </p:nvPr>
+        </p:nvCxnSpPr>
+        <p:spPr>
+          <a:xfrm flipV="1">
+            <a:off x="5077460" y="2294255"/>
+            <a:ext cx="387350" cy="859155"/>
+          </a:xfrm>
+          <a:prstGeom prst="line">
+            <a:avLst/>
+          </a:prstGeom>
+          <a:ln w="38100">
+            <a:solidFill>
+              <a:schemeClr val="tx1"/>
+            </a:solidFill>
+          </a:ln>
+        </p:spPr>
+        <p:style>
+          <a:lnRef idx="2">
+            <a:schemeClr val="accent1"/>
+          </a:lnRef>
+          <a:fillRef idx="0">
+            <a:srgbClr val="FFFFFF"/>
+          </a:fillRef>
+          <a:effectRef idx="0">
+            <a:srgbClr val="FFFFFF"/>
+          </a:effectRef>
+          <a:fontRef idx="minor">
+            <a:schemeClr val="tx1"/>
+          </a:fontRef>
+        </p:style>
+      </p:cxnSp>
+      <p:cxnSp>
+        <p:nvCxnSpPr>
+          <p:cNvPr id="13" name="直接连接符 12"/>
+          <p:cNvCxnSpPr/>
+          <p:nvPr>
+            <p:custDataLst>
+              <p:tags r:id="rId15"/>
+            </p:custDataLst>
+          </p:nvPr>
+        </p:nvCxnSpPr>
+        <p:spPr>
+          <a:xfrm flipV="1">
+            <a:off x="5646420" y="1856105"/>
+            <a:ext cx="450215" cy="1309370"/>
+          </a:xfrm>
+          <a:prstGeom prst="line">
+            <a:avLst/>
+          </a:prstGeom>
+          <a:ln w="38100">
+            <a:solidFill>
+              <a:schemeClr val="tx1"/>
+            </a:solidFill>
+          </a:ln>
+        </p:spPr>
+        <p:style>
+          <a:lnRef idx="2">
+            <a:schemeClr val="accent1"/>
+          </a:lnRef>
+          <a:fillRef idx="0">
+            <a:srgbClr val="FFFFFF"/>
+          </a:fillRef>
+          <a:effectRef idx="0">
+            <a:srgbClr val="FFFFFF"/>
+          </a:effectRef>
+          <a:fontRef idx="minor">
+            <a:schemeClr val="tx1"/>
+          </a:fontRef>
+        </p:style>
+      </p:cxnSp>
+      <p:cxnSp>
+        <p:nvCxnSpPr>
+          <p:cNvPr id="14" name="直接连接符 13"/>
+          <p:cNvCxnSpPr/>
+          <p:nvPr>
+            <p:custDataLst>
+              <p:tags r:id="rId16"/>
+            </p:custDataLst>
+          </p:nvPr>
+        </p:nvCxnSpPr>
+        <p:spPr>
+          <a:xfrm flipH="1" flipV="1">
+            <a:off x="8840470" y="1856105"/>
+            <a:ext cx="3114040" cy="1212850"/>
+          </a:xfrm>
+          <a:prstGeom prst="line">
+            <a:avLst/>
+          </a:prstGeom>
+          <a:ln w="38100">
+            <a:solidFill>
+              <a:schemeClr val="tx1"/>
+            </a:solidFill>
+          </a:ln>
+        </p:spPr>
+        <p:style>
+          <a:lnRef idx="2">
+            <a:schemeClr val="accent1"/>
+          </a:lnRef>
+          <a:fillRef idx="0">
+            <a:srgbClr val="FFFFFF"/>
+          </a:fillRef>
+          <a:effectRef idx="0">
+            <a:srgbClr val="FFFFFF"/>
+          </a:effectRef>
+          <a:fontRef idx="minor">
+            <a:schemeClr val="tx1"/>
+          </a:fontRef>
+        </p:style>
+      </p:cxnSp>
+    </p:spTree>
+  </p:cSld>
+  <p:clrMapOvr>
+    <a:masterClrMapping/>
+  </p:clrMapOvr>
+</p:sld>
+</file>
+
+<file path=ppt/slides/slide21.xml><?xml version="1.0" encoding="utf-8"?>
+<p:sld xmlns:a="http://schemas.openxmlformats.org/drawingml/2006/main" xmlns:r="http://schemas.openxmlformats.org/officeDocument/2006/relationships" xmlns:p="http://schemas.openxmlformats.org/presentationml/2006/main">
+  <p:cSld>
+    <p:spTree>
+      <p:nvGrpSpPr>
+        <p:cNvPr id="1" name=""/>
+        <p:cNvGrpSpPr/>
+        <p:nvPr/>
+      </p:nvGrpSpPr>
+      <p:grpSpPr/>
+      <p:sp>
+        <p:nvSpPr>
+          <p:cNvPr id="2" name="标题 1"/>
+          <p:cNvSpPr>
+            <a:spLocks noGrp="1"/>
+          </p:cNvSpPr>
+          <p:nvPr>
+            <p:ph type="ctrTitle"/>
+          </p:nvPr>
+        </p:nvSpPr>
+        <p:spPr/>
+        <p:txBody>
+          <a:bodyPr/>
+          <a:p>
+            <a:r>
+              <a:rPr lang="en-US" altLang="zh-CN"/>
+              <a:t>LLaVA</a:t>
+            </a:r>
+            <a:endParaRPr lang="en-US" altLang="zh-CN"/>
+          </a:p>
+        </p:txBody>
+      </p:sp>
+      <p:sp>
+        <p:nvSpPr>
+          <p:cNvPr id="3" name="副标题 2"/>
+          <p:cNvSpPr>
+            <a:spLocks noGrp="1"/>
+          </p:cNvSpPr>
+          <p:nvPr>
+            <p:ph type="subTitle" idx="1"/>
+          </p:nvPr>
+        </p:nvSpPr>
+        <p:spPr/>
+        <p:txBody>
+          <a:bodyPr/>
+          <a:p>
+            <a:endParaRPr lang="zh-CN" altLang="en-US"/>
+          </a:p>
+        </p:txBody>
+      </p:sp>
+    </p:spTree>
+  </p:cSld>
+  <p:clrMapOvr>
+    <a:masterClrMapping/>
+  </p:clrMapOvr>
+</p:sld>
+</file>
+
+<file path=ppt/slides/slide22.xml><?xml version="1.0" encoding="utf-8"?>
+<p:sld xmlns:a="http://schemas.openxmlformats.org/drawingml/2006/main" xmlns:r="http://schemas.openxmlformats.org/officeDocument/2006/relationships" xmlns:p="http://schemas.openxmlformats.org/presentationml/2006/main">
+  <p:cSld>
+    <p:spTree>
+      <p:nvGrpSpPr>
+        <p:cNvPr id="1" name=""/>
+        <p:cNvGrpSpPr/>
+        <p:nvPr/>
+      </p:nvGrpSpPr>
+      <p:grpSpPr/>
+      <p:pic>
+        <p:nvPicPr>
+          <p:cNvPr id="2" name="图片 1"/>
+          <p:cNvPicPr>
+            <a:picLocks noChangeAspect="1"/>
+          </p:cNvPicPr>
+          <p:nvPr>
+            <p:custDataLst>
+              <p:tags r:id="rId1"/>
+            </p:custDataLst>
+          </p:nvPr>
+        </p:nvPicPr>
+        <p:blipFill>
+          <a:blip r:embed="rId2"/>
+          <a:stretch>
+            <a:fillRect/>
+          </a:stretch>
+        </p:blipFill>
+        <p:spPr>
+          <a:xfrm>
+            <a:off x="5080000" y="1294765"/>
+            <a:ext cx="6354445" cy="4150995"/>
+          </a:xfrm>
+          <a:prstGeom prst="rect">
+            <a:avLst/>
+          </a:prstGeom>
+        </p:spPr>
+      </p:pic>
+      <p:sp>
+        <p:nvSpPr>
+          <p:cNvPr id="6" name="文本框 5"/>
+          <p:cNvSpPr txBox="1"/>
+          <p:nvPr>
+            <p:custDataLst>
+              <p:tags r:id="rId3"/>
+            </p:custDataLst>
+          </p:nvPr>
+        </p:nvSpPr>
+        <p:spPr>
+          <a:xfrm>
+            <a:off x="0" y="1294765"/>
+            <a:ext cx="4620260" cy="853440"/>
+          </a:xfrm>
+          <a:prstGeom prst="rect">
+            <a:avLst/>
+          </a:prstGeom>
+          <a:noFill/>
+        </p:spPr>
+        <p:txBody>
+          <a:bodyPr wrap="square" rtlCol="0">
+            <a:noAutofit/>
+          </a:bodyPr>
+          <a:p>
+            <a:pPr algn="ctr"/>
+            <a:r>
+              <a:rPr lang="zh-CN" altLang="en-US" sz="1200" b="1">
+                <a:latin typeface="微软雅黑" charset="0"/>
+                <a:ea typeface="微软雅黑" charset="0"/>
+                <a:cs typeface="微软雅黑" charset="0"/>
+              </a:rPr>
+              <a:t>初始信息</a:t>
+            </a:r>
+            <a:br>
+              <a:rPr lang="zh-CN" altLang="en-US" sz="1200" b="1">
+                <a:latin typeface="微软雅黑" charset="0"/>
+                <a:ea typeface="微软雅黑" charset="0"/>
+                <a:cs typeface="微软雅黑" charset="0"/>
+              </a:rPr>
+            </a:br>
+            <a:r>
+              <a:rPr lang="en-US" altLang="zh-CN" sz="1200" b="1">
+                <a:latin typeface="微软雅黑" charset="0"/>
+                <a:ea typeface="微软雅黑" charset="0"/>
+                <a:cs typeface="微软雅黑" charset="0"/>
+              </a:rPr>
+              <a:t>CoCo</a:t>
+            </a:r>
+            <a:r>
+              <a:rPr lang="zh-CN" altLang="en-US" sz="1200" b="1">
+                <a:latin typeface="微软雅黑" charset="0"/>
+                <a:ea typeface="微软雅黑" charset="0"/>
+                <a:cs typeface="微软雅黑" charset="0"/>
+              </a:rPr>
+              <a:t>数据集为例</a:t>
+            </a:r>
+            <a:br>
+              <a:rPr lang="zh-CN" altLang="en-US" sz="1200" b="1">
+                <a:latin typeface="微软雅黑" charset="0"/>
+                <a:ea typeface="微软雅黑" charset="0"/>
+                <a:cs typeface="微软雅黑" charset="0"/>
+              </a:rPr>
+            </a:br>
+            <a:r>
+              <a:rPr lang="en-US" altLang="zh-CN" sz="1200" b="1">
+                <a:latin typeface="微软雅黑" charset="0"/>
+                <a:ea typeface="微软雅黑" charset="0"/>
+                <a:cs typeface="微软雅黑" charset="0"/>
+              </a:rPr>
+              <a:t>1. </a:t>
+            </a:r>
+            <a:r>
+              <a:rPr lang="zh-CN" altLang="en-US" sz="1200" b="1">
+                <a:latin typeface="微软雅黑" charset="0"/>
+                <a:ea typeface="微软雅黑" charset="0"/>
+                <a:cs typeface="微软雅黑" charset="0"/>
+              </a:rPr>
+              <a:t>图像描述（</a:t>
+            </a:r>
+            <a:r>
+              <a:rPr lang="en-US" altLang="zh-CN" sz="1200" b="1">
+                <a:latin typeface="微软雅黑" charset="0"/>
+                <a:ea typeface="微软雅黑" charset="0"/>
+                <a:cs typeface="微软雅黑" charset="0"/>
+              </a:rPr>
+              <a:t>Image Caption</a:t>
+            </a:r>
+            <a:r>
+              <a:rPr lang="zh-CN" altLang="en-US" sz="1200" b="1">
+                <a:latin typeface="微软雅黑" charset="0"/>
+                <a:ea typeface="微软雅黑" charset="0"/>
+                <a:cs typeface="微软雅黑" charset="0"/>
+              </a:rPr>
+              <a:t>）</a:t>
+            </a:r>
+            <a:endParaRPr lang="zh-CN" altLang="en-US" sz="1200" b="1">
+              <a:latin typeface="微软雅黑" charset="0"/>
+              <a:ea typeface="微软雅黑" charset="0"/>
+              <a:cs typeface="微软雅黑" charset="0"/>
+            </a:endParaRPr>
+          </a:p>
+          <a:p>
+            <a:pPr algn="ctr"/>
+            <a:r>
+              <a:rPr lang="en-US" altLang="zh-CN" sz="1200" b="1">
+                <a:latin typeface="微软雅黑" charset="0"/>
+                <a:ea typeface="微软雅黑" charset="0"/>
+                <a:cs typeface="微软雅黑" charset="0"/>
+              </a:rPr>
+              <a:t>2. </a:t>
+            </a:r>
+            <a:r>
+              <a:rPr lang="zh-CN" altLang="en-US" sz="1200" b="1">
+                <a:latin typeface="微软雅黑" charset="0"/>
+                <a:ea typeface="微软雅黑" charset="0"/>
+                <a:cs typeface="微软雅黑" charset="0"/>
+              </a:rPr>
+              <a:t>物体检测</a:t>
+            </a:r>
+            <a:r>
+              <a:rPr lang="zh-CN" altLang="en-US" sz="1200" b="1">
+                <a:latin typeface="微软雅黑" charset="0"/>
+                <a:ea typeface="微软雅黑" charset="0"/>
+                <a:cs typeface="微软雅黑" charset="0"/>
+              </a:rPr>
+              <a:t>标注（Bounding Boxes）</a:t>
+            </a:r>
+            <a:endParaRPr lang="en-US" altLang="zh-CN" sz="1200" b="1">
+              <a:latin typeface="微软雅黑" charset="0"/>
+              <a:ea typeface="微软雅黑" charset="0"/>
+              <a:cs typeface="微软雅黑" charset="0"/>
+            </a:endParaRPr>
+          </a:p>
+        </p:txBody>
+      </p:sp>
+      <p:sp>
+        <p:nvSpPr>
+          <p:cNvPr id="3" name="文本框 2"/>
+          <p:cNvSpPr txBox="1"/>
+          <p:nvPr>
+            <p:custDataLst>
+              <p:tags r:id="rId4"/>
+            </p:custDataLst>
+          </p:nvPr>
+        </p:nvSpPr>
+        <p:spPr>
+          <a:xfrm>
+            <a:off x="127000" y="2943225"/>
+            <a:ext cx="4620260" cy="853440"/>
+          </a:xfrm>
+          <a:prstGeom prst="rect">
+            <a:avLst/>
+          </a:prstGeom>
+          <a:noFill/>
+        </p:spPr>
+        <p:txBody>
+          <a:bodyPr wrap="square" rtlCol="0">
+            <a:noAutofit/>
+          </a:bodyPr>
+          <a:p>
+            <a:pPr algn="ctr"/>
+            <a:r>
+              <a:rPr lang="en-US" altLang="zh-CN" sz="1200" b="1">
+                <a:latin typeface="微软雅黑" charset="0"/>
+                <a:ea typeface="微软雅黑" charset="0"/>
+                <a:cs typeface="微软雅黑" charset="0"/>
+              </a:rPr>
+              <a:t>1. VQA</a:t>
+            </a:r>
+            <a:br>
+              <a:rPr lang="en-US" altLang="zh-CN" sz="1200" b="1">
+                <a:latin typeface="微软雅黑" charset="0"/>
+                <a:ea typeface="微软雅黑" charset="0"/>
+                <a:cs typeface="微软雅黑" charset="0"/>
+              </a:rPr>
+            </a:br>
+            <a:r>
+              <a:rPr lang="zh-CN" altLang="en-US" sz="1200" b="1">
+                <a:latin typeface="微软雅黑" charset="0"/>
+                <a:ea typeface="微软雅黑" charset="0"/>
+                <a:cs typeface="微软雅黑" charset="0"/>
+              </a:rPr>
+              <a:t>根据拥有</a:t>
+            </a:r>
+            <a:r>
+              <a:rPr lang="en-US" altLang="zh-CN" sz="1200" b="1">
+                <a:latin typeface="微软雅黑" charset="0"/>
+                <a:ea typeface="微软雅黑" charset="0"/>
+                <a:cs typeface="微软雅黑" charset="0"/>
+              </a:rPr>
+              <a:t>Caption</a:t>
+            </a:r>
+            <a:r>
+              <a:rPr lang="zh-CN" altLang="en-US" sz="1200" b="1">
+                <a:latin typeface="微软雅黑" charset="0"/>
+                <a:ea typeface="微软雅黑" charset="0"/>
+                <a:cs typeface="微软雅黑" charset="0"/>
+              </a:rPr>
+              <a:t>和</a:t>
+            </a:r>
+            <a:r>
+              <a:rPr lang="en-US" altLang="zh-CN" sz="1200" b="1">
+                <a:latin typeface="微软雅黑" charset="0"/>
+                <a:ea typeface="微软雅黑" charset="0"/>
+                <a:cs typeface="微软雅黑" charset="0"/>
+              </a:rPr>
+              <a:t>Bound Box</a:t>
+            </a:r>
+            <a:r>
+              <a:rPr lang="zh-CN" altLang="en-US" sz="1200" b="1">
+                <a:latin typeface="微软雅黑" charset="0"/>
+                <a:ea typeface="微软雅黑" charset="0"/>
+                <a:cs typeface="微软雅黑" charset="0"/>
+              </a:rPr>
+              <a:t>通过问答的形式生成</a:t>
+            </a:r>
+            <a:r>
+              <a:rPr lang="zh-CN" altLang="en-US" sz="1200" b="1">
+                <a:latin typeface="微软雅黑" charset="0"/>
+                <a:ea typeface="微软雅黑" charset="0"/>
+                <a:cs typeface="微软雅黑" charset="0"/>
+              </a:rPr>
+              <a:t>对话</a:t>
+            </a:r>
+            <a:endParaRPr lang="zh-CN" altLang="en-US" sz="1200" b="1">
+              <a:latin typeface="微软雅黑" charset="0"/>
+              <a:ea typeface="微软雅黑" charset="0"/>
+              <a:cs typeface="微软雅黑" charset="0"/>
+            </a:endParaRPr>
+          </a:p>
+        </p:txBody>
+      </p:sp>
+      <p:sp>
+        <p:nvSpPr>
+          <p:cNvPr id="4" name="文本框 3"/>
+          <p:cNvSpPr txBox="1"/>
+          <p:nvPr>
+            <p:custDataLst>
+              <p:tags r:id="rId5"/>
+            </p:custDataLst>
+          </p:nvPr>
+        </p:nvSpPr>
+        <p:spPr>
+          <a:xfrm>
+            <a:off x="127000" y="3615055"/>
+            <a:ext cx="4620260" cy="853440"/>
+          </a:xfrm>
+          <a:prstGeom prst="rect">
+            <a:avLst/>
+          </a:prstGeom>
+          <a:noFill/>
+        </p:spPr>
+        <p:txBody>
+          <a:bodyPr wrap="square" rtlCol="0">
+            <a:noAutofit/>
+          </a:bodyPr>
+          <a:p>
+            <a:pPr algn="ctr"/>
+            <a:r>
+              <a:rPr lang="en-US" altLang="zh-CN" sz="1200" b="1">
+                <a:latin typeface="微软雅黑" charset="0"/>
+                <a:ea typeface="微软雅黑" charset="0"/>
+                <a:cs typeface="微软雅黑" charset="0"/>
+              </a:rPr>
+              <a:t>2. </a:t>
+            </a:r>
+            <a:r>
+              <a:rPr lang="zh-CN" altLang="en-US" sz="1200" b="1">
+                <a:latin typeface="微软雅黑" charset="0"/>
+                <a:ea typeface="微软雅黑" charset="0"/>
+                <a:cs typeface="微软雅黑" charset="0"/>
+              </a:rPr>
+              <a:t>完整描述</a:t>
+            </a:r>
+            <a:br>
+              <a:rPr lang="zh-CN" altLang="en-US" sz="1200" b="1">
+                <a:latin typeface="微软雅黑" charset="0"/>
+                <a:ea typeface="微软雅黑" charset="0"/>
+                <a:cs typeface="微软雅黑" charset="0"/>
+              </a:rPr>
+            </a:br>
+            <a:r>
+              <a:rPr lang="zh-CN" altLang="en-US" sz="1200" b="1">
+                <a:latin typeface="微软雅黑" charset="0"/>
+                <a:ea typeface="微软雅黑" charset="0"/>
+                <a:cs typeface="微软雅黑" charset="0"/>
+              </a:rPr>
+              <a:t>对图像进行更详细的</a:t>
+            </a:r>
+            <a:r>
+              <a:rPr lang="zh-CN" altLang="en-US" sz="1200" b="1">
+                <a:latin typeface="微软雅黑" charset="0"/>
+                <a:ea typeface="微软雅黑" charset="0"/>
+                <a:cs typeface="微软雅黑" charset="0"/>
+              </a:rPr>
+              <a:t>描述</a:t>
+            </a:r>
+            <a:endParaRPr lang="zh-CN" altLang="en-US" sz="1200" b="1">
+              <a:latin typeface="微软雅黑" charset="0"/>
+              <a:ea typeface="微软雅黑" charset="0"/>
+              <a:cs typeface="微软雅黑" charset="0"/>
+            </a:endParaRPr>
+          </a:p>
+        </p:txBody>
+      </p:sp>
+      <p:sp>
+        <p:nvSpPr>
+          <p:cNvPr id="5" name="文本框 4"/>
+          <p:cNvSpPr txBox="1"/>
+          <p:nvPr>
+            <p:custDataLst>
+              <p:tags r:id="rId6"/>
+            </p:custDataLst>
+          </p:nvPr>
+        </p:nvSpPr>
+        <p:spPr>
+          <a:xfrm>
+            <a:off x="127000" y="4371975"/>
+            <a:ext cx="4620260" cy="853440"/>
+          </a:xfrm>
+          <a:prstGeom prst="rect">
+            <a:avLst/>
+          </a:prstGeom>
+          <a:noFill/>
+        </p:spPr>
+        <p:txBody>
+          <a:bodyPr wrap="square" rtlCol="0">
+            <a:noAutofit/>
+          </a:bodyPr>
+          <a:p>
+            <a:pPr algn="ctr"/>
+            <a:r>
+              <a:rPr lang="en-US" altLang="zh-CN" sz="1200" b="1">
+                <a:latin typeface="微软雅黑" charset="0"/>
+                <a:ea typeface="微软雅黑" charset="0"/>
+                <a:cs typeface="微软雅黑" charset="0"/>
+              </a:rPr>
+              <a:t>3. </a:t>
+            </a:r>
+            <a:r>
+              <a:rPr lang="zh-CN" altLang="en-US" sz="1200" b="1">
+                <a:latin typeface="微软雅黑" charset="0"/>
+                <a:ea typeface="微软雅黑" charset="0"/>
+                <a:cs typeface="微软雅黑" charset="0"/>
+              </a:rPr>
+              <a:t>复杂推理</a:t>
+            </a:r>
+            <a:br>
+              <a:rPr lang="zh-CN" altLang="en-US" sz="1200" b="1">
+                <a:latin typeface="微软雅黑" charset="0"/>
+                <a:ea typeface="微软雅黑" charset="0"/>
+                <a:cs typeface="微软雅黑" charset="0"/>
+              </a:rPr>
+            </a:br>
+            <a:r>
+              <a:rPr lang="zh-CN" altLang="en-US" sz="1200" b="1">
+                <a:latin typeface="微软雅黑" charset="0"/>
+                <a:ea typeface="微软雅黑" charset="0"/>
+                <a:cs typeface="微软雅黑" charset="0"/>
+              </a:rPr>
+              <a:t>结合</a:t>
+            </a:r>
+            <a:r>
+              <a:rPr lang="en-US" altLang="zh-CN" sz="1200" b="1">
+                <a:latin typeface="微软雅黑" charset="0"/>
+                <a:ea typeface="微软雅黑" charset="0"/>
+                <a:cs typeface="微软雅黑" charset="0"/>
+              </a:rPr>
+              <a:t>1</a:t>
+            </a:r>
+            <a:r>
+              <a:rPr lang="zh-CN" altLang="en-US" sz="1200" b="1">
+                <a:latin typeface="微软雅黑" charset="0"/>
+                <a:ea typeface="微软雅黑" charset="0"/>
+                <a:cs typeface="微软雅黑" charset="0"/>
+              </a:rPr>
+              <a:t>、</a:t>
+            </a:r>
+            <a:r>
+              <a:rPr lang="en-US" altLang="zh-CN" sz="1200" b="1">
+                <a:latin typeface="微软雅黑" charset="0"/>
+                <a:ea typeface="微软雅黑" charset="0"/>
+                <a:cs typeface="微软雅黑" charset="0"/>
+              </a:rPr>
+              <a:t>2</a:t>
+            </a:r>
+            <a:r>
+              <a:rPr lang="zh-CN" altLang="en-US" sz="1200" b="1">
+                <a:latin typeface="微软雅黑" charset="0"/>
+                <a:ea typeface="微软雅黑" charset="0"/>
+                <a:cs typeface="微软雅黑" charset="0"/>
+              </a:rPr>
+              <a:t>，并提出更深层次的</a:t>
+            </a:r>
+            <a:r>
+              <a:rPr lang="zh-CN" altLang="en-US" sz="1200" b="1">
+                <a:latin typeface="微软雅黑" charset="0"/>
+                <a:ea typeface="微软雅黑" charset="0"/>
+                <a:cs typeface="微软雅黑" charset="0"/>
+              </a:rPr>
+              <a:t>问题</a:t>
+            </a:r>
+            <a:endParaRPr lang="zh-CN" altLang="en-US" sz="1200" b="1">
+              <a:latin typeface="微软雅黑" charset="0"/>
+              <a:ea typeface="微软雅黑" charset="0"/>
+              <a:cs typeface="微软雅黑" charset="0"/>
+            </a:endParaRPr>
+          </a:p>
+        </p:txBody>
+      </p:sp>
+    </p:spTree>
+  </p:cSld>
+  <p:clrMapOvr>
+    <a:masterClrMapping/>
+  </p:clrMapOvr>
+</p:sld>
+</file>
+
 <file path=ppt/slides/slide3.xml><?xml version="1.0" encoding="utf-8"?>
 <p:sld xmlns:a="http://schemas.openxmlformats.org/drawingml/2006/main" xmlns:r="http://schemas.openxmlformats.org/officeDocument/2006/relationships" xmlns:p="http://schemas.openxmlformats.org/presentationml/2006/main">
   <p:cSld>
@@ -17782,6 +17778,30 @@
 </file>
 
 <file path=ppt/tags/tag201.xml><?xml version="1.0" encoding="utf-8"?>
+<p:tagLst xmlns:p="http://schemas.openxmlformats.org/presentationml/2006/main">
+  <p:tag name="KSO_WM_BEAUTIFY_FLAG" val=""/>
+</p:tagLst>
+</file>
+
+<file path=ppt/tags/tag202.xml><?xml version="1.0" encoding="utf-8"?>
+<p:tagLst xmlns:p="http://schemas.openxmlformats.org/presentationml/2006/main">
+  <p:tag name="KSO_WM_BEAUTIFY_FLAG" val=""/>
+</p:tagLst>
+</file>
+
+<file path=ppt/tags/tag203.xml><?xml version="1.0" encoding="utf-8"?>
+<p:tagLst xmlns:p="http://schemas.openxmlformats.org/presentationml/2006/main">
+  <p:tag name="KSO_WM_BEAUTIFY_FLAG" val=""/>
+</p:tagLst>
+</file>
+
+<file path=ppt/tags/tag204.xml><?xml version="1.0" encoding="utf-8"?>
+<p:tagLst xmlns:p="http://schemas.openxmlformats.org/presentationml/2006/main">
+  <p:tag name="KSO_WM_BEAUTIFY_FLAG" val=""/>
+</p:tagLst>
+</file>
+
+<file path=ppt/tags/tag205.xml><?xml version="1.0" encoding="utf-8"?>
 <p:tagLst xmlns:p="http://schemas.openxmlformats.org/presentationml/2006/main">
   <p:tag name="KSO_WM_BEAUTIFY_FLAG" val=""/>
 </p:tagLst>
